--- a/Resusci-Time-QI-and-Technical-Overview-new.pptx
+++ b/Resusci-Time-QI-and-Technical-Overview-new.pptx
@@ -24,6 +24,12 @@
     <p:sldId id="272" r:id="rId23"/>
     <p:sldId id="273" r:id="rId24"/>
     <p:sldId id="274" r:id="rId25"/>
+    <p:sldId id="275" r:id="rId26"/>
+    <p:sldId id="276" r:id="rId27"/>
+    <p:sldId id="277" r:id="rId28"/>
+    <p:sldId id="278" r:id="rId29"/>
+    <p:sldId id="279" r:id="rId30"/>
+    <p:sldId id="280" r:id="rId31"/>
   </p:sldIdLst>
   <p:sldSz cx="12191695" cy="6858000" type="screen4x3"/>
   <p:notesSz cx="6858000" cy="9144000"/>
@@ -3265,7 +3271,7 @@
                 </a:solidFill>
                 <a:latin typeface="Segoe UI"/>
               </a:rPr>
-              <a:t>Quality improvement briefing · Preview build v1.2.4</a:t>
+              <a:t>Quality improvement briefing · Preview build v1.2.7</a:t>
             </a:r>
           </a:p>
           <a:p>
@@ -3281,7 +3287,7 @@
                 </a:solidFill>
                 <a:latin typeface="Segoe UI"/>
               </a:rPr>
-              <a:t>7 June 2026</a:t>
+              <a:t>10 June 2026</a:t>
             </a:r>
           </a:p>
           <a:p>
@@ -3311,6 +3317,1548 @@
 </file>
 
 <file path=ppt/slides/slide10.xml><?xml version="1.0" encoding="utf-8"?>
+<p:sld xmlns:a="http://schemas.openxmlformats.org/drawingml/2006/main" xmlns:p="http://schemas.openxmlformats.org/presentationml/2006/main" xmlns:r="http://schemas.openxmlformats.org/officeDocument/2006/relationships">
+  <p:cSld>
+    <p:spTree>
+      <p:nvGrpSpPr>
+        <p:cNvPr id="1" name=""/>
+        <p:cNvGrpSpPr/>
+        <p:nvPr/>
+      </p:nvGrpSpPr>
+      <p:grpSpPr/>
+      <p:sp>
+        <p:nvSpPr>
+          <p:cNvPr id="2" name="Rectangle 1"/>
+          <p:cNvSpPr/>
+          <p:nvPr/>
+        </p:nvSpPr>
+        <p:spPr>
+          <a:xfrm>
+            <a:off x="0" y="0"/>
+            <a:ext cx="12191695" cy="6858000"/>
+          </a:xfrm>
+          <a:prstGeom prst="rect">
+            <a:avLst/>
+          </a:prstGeom>
+          <a:solidFill>
+            <a:srgbClr val="DFE8DF"/>
+          </a:solidFill>
+          <a:ln>
+            <a:noFill/>
+          </a:ln>
+        </p:spPr>
+        <p:style>
+          <a:lnRef idx="1">
+            <a:schemeClr val="accent1"/>
+          </a:lnRef>
+          <a:fillRef idx="3">
+            <a:schemeClr val="accent1"/>
+          </a:fillRef>
+          <a:effectRef idx="2">
+            <a:schemeClr val="accent1"/>
+          </a:effectRef>
+          <a:fontRef idx="minor">
+            <a:schemeClr val="lt1"/>
+          </a:fontRef>
+        </p:style>
+        <p:txBody>
+          <a:bodyPr rtlCol="0" anchor="ctr"/>
+          <a:lstStyle/>
+          <a:p>
+            <a:pPr algn="ctr"/>
+          </a:p>
+        </p:txBody>
+      </p:sp>
+      <p:sp>
+        <p:nvSpPr>
+          <p:cNvPr id="3" name="Rectangle 2"/>
+          <p:cNvSpPr/>
+          <p:nvPr/>
+        </p:nvSpPr>
+        <p:spPr>
+          <a:xfrm>
+            <a:off x="0" y="0"/>
+            <a:ext cx="12191695" cy="109728"/>
+          </a:xfrm>
+          <a:prstGeom prst="rect">
+            <a:avLst/>
+          </a:prstGeom>
+          <a:solidFill>
+            <a:srgbClr val="1F4F1F"/>
+          </a:solidFill>
+          <a:ln>
+            <a:noFill/>
+          </a:ln>
+        </p:spPr>
+        <p:style>
+          <a:lnRef idx="1">
+            <a:schemeClr val="accent1"/>
+          </a:lnRef>
+          <a:fillRef idx="3">
+            <a:schemeClr val="accent1"/>
+          </a:fillRef>
+          <a:effectRef idx="2">
+            <a:schemeClr val="accent1"/>
+          </a:effectRef>
+          <a:fontRef idx="minor">
+            <a:schemeClr val="lt1"/>
+          </a:fontRef>
+        </p:style>
+        <p:txBody>
+          <a:bodyPr rtlCol="0" anchor="ctr"/>
+          <a:lstStyle/>
+          <a:p>
+            <a:pPr algn="ctr"/>
+          </a:p>
+        </p:txBody>
+      </p:sp>
+      <p:sp>
+        <p:nvSpPr>
+          <p:cNvPr id="4" name="TextBox 3"/>
+          <p:cNvSpPr txBox="1"/>
+          <p:nvPr/>
+        </p:nvSpPr>
+        <p:spPr>
+          <a:xfrm>
+            <a:off x="777240" y="2651760"/>
+            <a:ext cx="10515600" cy="1097280"/>
+          </a:xfrm>
+          <a:prstGeom prst="rect">
+            <a:avLst/>
+          </a:prstGeom>
+          <a:noFill/>
+        </p:spPr>
+        <p:txBody>
+          <a:bodyPr wrap="none">
+            <a:spAutoFit/>
+          </a:bodyPr>
+          <a:lstStyle/>
+          <a:p>
+            <a:r>
+              <a:rPr sz="3200" b="1">
+                <a:solidFill>
+                  <a:srgbClr val="163816"/>
+                </a:solidFill>
+                <a:latin typeface="Segoe UI"/>
+              </a:rPr>
+              <a:t>Questions from the QI lead</a:t>
+            </a:r>
+          </a:p>
+        </p:txBody>
+      </p:sp>
+      <p:sp>
+        <p:nvSpPr>
+          <p:cNvPr id="5" name="Rectangle 4"/>
+          <p:cNvSpPr/>
+          <p:nvPr/>
+        </p:nvSpPr>
+        <p:spPr>
+          <a:xfrm>
+            <a:off x="777240" y="3246120"/>
+            <a:ext cx="2011680" cy="64008"/>
+          </a:xfrm>
+          <a:prstGeom prst="rect">
+            <a:avLst/>
+          </a:prstGeom>
+          <a:solidFill>
+            <a:srgbClr val="2D6A2D"/>
+          </a:solidFill>
+          <a:ln>
+            <a:noFill/>
+          </a:ln>
+        </p:spPr>
+        <p:style>
+          <a:lnRef idx="1">
+            <a:schemeClr val="accent1"/>
+          </a:lnRef>
+          <a:fillRef idx="3">
+            <a:schemeClr val="accent1"/>
+          </a:fillRef>
+          <a:effectRef idx="2">
+            <a:schemeClr val="accent1"/>
+          </a:effectRef>
+          <a:fontRef idx="minor">
+            <a:schemeClr val="lt1"/>
+          </a:fontRef>
+        </p:style>
+        <p:txBody>
+          <a:bodyPr rtlCol="0" anchor="ctr"/>
+          <a:lstStyle/>
+          <a:p>
+            <a:pPr algn="ctr"/>
+          </a:p>
+        </p:txBody>
+      </p:sp>
+    </p:spTree>
+  </p:cSld>
+  <p:clrMapOvr>
+    <a:masterClrMapping/>
+  </p:clrMapOvr>
+</p:sld>
+</file>
+
+<file path=ppt/slides/slide11.xml><?xml version="1.0" encoding="utf-8"?>
+<p:sld xmlns:a="http://schemas.openxmlformats.org/drawingml/2006/main" xmlns:p="http://schemas.openxmlformats.org/presentationml/2006/main" xmlns:r="http://schemas.openxmlformats.org/officeDocument/2006/relationships">
+  <p:cSld>
+    <p:spTree>
+      <p:nvGrpSpPr>
+        <p:cNvPr id="1" name=""/>
+        <p:cNvGrpSpPr/>
+        <p:nvPr/>
+      </p:nvGrpSpPr>
+      <p:grpSpPr/>
+      <p:sp>
+        <p:nvSpPr>
+          <p:cNvPr id="2" name="Rectangle 1"/>
+          <p:cNvSpPr/>
+          <p:nvPr/>
+        </p:nvSpPr>
+        <p:spPr>
+          <a:xfrm>
+            <a:off x="0" y="0"/>
+            <a:ext cx="12191695" cy="6858000"/>
+          </a:xfrm>
+          <a:prstGeom prst="rect">
+            <a:avLst/>
+          </a:prstGeom>
+          <a:solidFill>
+            <a:srgbClr val="DFE8DF"/>
+          </a:solidFill>
+          <a:ln>
+            <a:noFill/>
+          </a:ln>
+        </p:spPr>
+        <p:style>
+          <a:lnRef idx="1">
+            <a:schemeClr val="accent1"/>
+          </a:lnRef>
+          <a:fillRef idx="3">
+            <a:schemeClr val="accent1"/>
+          </a:fillRef>
+          <a:effectRef idx="2">
+            <a:schemeClr val="accent1"/>
+          </a:effectRef>
+          <a:fontRef idx="minor">
+            <a:schemeClr val="lt1"/>
+          </a:fontRef>
+        </p:style>
+        <p:txBody>
+          <a:bodyPr rtlCol="0" anchor="ctr"/>
+          <a:lstStyle/>
+          <a:p>
+            <a:pPr algn="ctr"/>
+          </a:p>
+        </p:txBody>
+      </p:sp>
+      <p:sp>
+        <p:nvSpPr>
+          <p:cNvPr id="3" name="Rectangle 2"/>
+          <p:cNvSpPr/>
+          <p:nvPr/>
+        </p:nvSpPr>
+        <p:spPr>
+          <a:xfrm>
+            <a:off x="0" y="0"/>
+            <a:ext cx="12191695" cy="109728"/>
+          </a:xfrm>
+          <a:prstGeom prst="rect">
+            <a:avLst/>
+          </a:prstGeom>
+          <a:solidFill>
+            <a:srgbClr val="1F4F1F"/>
+          </a:solidFill>
+          <a:ln>
+            <a:noFill/>
+          </a:ln>
+        </p:spPr>
+        <p:style>
+          <a:lnRef idx="1">
+            <a:schemeClr val="accent1"/>
+          </a:lnRef>
+          <a:fillRef idx="3">
+            <a:schemeClr val="accent1"/>
+          </a:fillRef>
+          <a:effectRef idx="2">
+            <a:schemeClr val="accent1"/>
+          </a:effectRef>
+          <a:fontRef idx="minor">
+            <a:schemeClr val="lt1"/>
+          </a:fontRef>
+        </p:style>
+        <p:txBody>
+          <a:bodyPr rtlCol="0" anchor="ctr"/>
+          <a:lstStyle/>
+          <a:p>
+            <a:pPr algn="ctr"/>
+          </a:p>
+        </p:txBody>
+      </p:sp>
+      <p:sp>
+        <p:nvSpPr>
+          <p:cNvPr id="4" name="TextBox 3"/>
+          <p:cNvSpPr txBox="1"/>
+          <p:nvPr/>
+        </p:nvSpPr>
+        <p:spPr>
+          <a:xfrm>
+            <a:off x="777240" y="502920"/>
+            <a:ext cx="10515600" cy="640080"/>
+          </a:xfrm>
+          <a:prstGeom prst="rect">
+            <a:avLst/>
+          </a:prstGeom>
+          <a:noFill/>
+        </p:spPr>
+        <p:txBody>
+          <a:bodyPr wrap="none">
+            <a:spAutoFit/>
+          </a:bodyPr>
+          <a:lstStyle/>
+          <a:p>
+            <a:r>
+              <a:rPr sz="2600" b="1">
+                <a:solidFill>
+                  <a:srgbClr val="163816"/>
+                </a:solidFill>
+                <a:latin typeface="Segoe UI"/>
+              </a:rPr>
+              <a:t>1. What is its purpose?</a:t>
+            </a:r>
+          </a:p>
+        </p:txBody>
+      </p:sp>
+      <p:sp>
+        <p:nvSpPr>
+          <p:cNvPr id="5" name="TextBox 4"/>
+          <p:cNvSpPr txBox="1"/>
+          <p:nvPr/>
+        </p:nvSpPr>
+        <p:spPr>
+          <a:xfrm>
+            <a:off x="868680" y="1234440"/>
+            <a:ext cx="10332720" cy="4937760"/>
+          </a:xfrm>
+          <a:prstGeom prst="rect">
+            <a:avLst/>
+          </a:prstGeom>
+          <a:noFill/>
+        </p:spPr>
+        <p:txBody>
+          <a:bodyPr wrap="square">
+            <a:spAutoFit/>
+          </a:bodyPr>
+          <a:lstStyle/>
+          <a:p>
+            <a:pPr>
+              <a:spcAft>
+                <a:spcPts val="500"/>
+              </a:spcAft>
+            </a:pPr>
+            <a:r>
+              <a:rPr sz="1400" b="0">
+                <a:solidFill>
+                  <a:srgbClr val="1A2E1A"/>
+                </a:solidFill>
+                <a:latin typeface="Segoe UI"/>
+              </a:rPr>
+              <a:t>Guided timer + checklist for adult cardiac arrest (pre-hospital)</a:t>
+            </a:r>
+          </a:p>
+          <a:p>
+            <a:pPr>
+              <a:spcAft>
+                <a:spcPts val="500"/>
+              </a:spcAft>
+            </a:pPr>
+            <a:r>
+              <a:rPr sz="1400" b="0">
+                <a:solidFill>
+                  <a:srgbClr val="1A2E1A"/>
+                </a:solidFill>
+                <a:latin typeface="Segoe UI"/>
+              </a:rPr>
+              <a:t>Prompts rhythm checks, drugs, ROSC monitoring, TOR, and VoD in line with JRCALC / AACE</a:t>
+            </a:r>
+          </a:p>
+          <a:p>
+            <a:pPr>
+              <a:spcAft>
+                <a:spcPts val="500"/>
+              </a:spcAft>
+            </a:pPr>
+            <a:r>
+              <a:rPr sz="1400" b="0">
+                <a:solidFill>
+                  <a:srgbClr val="1A2E1A"/>
+                </a:solidFill>
+                <a:latin typeface="Segoe UI"/>
+              </a:rPr>
+              <a:t>Timestamped event log for handover, debrief, and QA</a:t>
+            </a:r>
+          </a:p>
+          <a:p>
+            <a:pPr>
+              <a:spcAft>
+                <a:spcPts val="500"/>
+              </a:spcAft>
+            </a:pPr>
+            <a:r>
+              <a:rPr sz="1400" b="0">
+                <a:solidFill>
+                  <a:srgbClr val="1A2E1A"/>
+                </a:solidFill>
+                <a:latin typeface="Segoe UI"/>
+              </a:rPr>
+              <a:t>WMAS build adds trust-specific prompts (e.g. CODE SHOCK to EOC)</a:t>
+            </a:r>
+          </a:p>
+          <a:p>
+            <a:pPr>
+              <a:spcAft>
+                <a:spcPts val="500"/>
+              </a:spcAft>
+            </a:pPr>
+            <a:r>
+              <a:rPr sz="1400" b="0">
+                <a:solidFill>
+                  <a:srgbClr val="1A2E1A"/>
+                </a:solidFill>
+                <a:latin typeface="Segoe UI"/>
+              </a:rPr>
+              <a:t>Support tool only — not a substitute for JRCALC, trust policy, or clinical judgement</a:t>
+            </a:r>
+          </a:p>
+        </p:txBody>
+      </p:sp>
+    </p:spTree>
+  </p:cSld>
+  <p:clrMapOvr>
+    <a:masterClrMapping/>
+  </p:clrMapOvr>
+</p:sld>
+</file>
+
+<file path=ppt/slides/slide12.xml><?xml version="1.0" encoding="utf-8"?>
+<p:sld xmlns:a="http://schemas.openxmlformats.org/drawingml/2006/main" xmlns:p="http://schemas.openxmlformats.org/presentationml/2006/main" xmlns:r="http://schemas.openxmlformats.org/officeDocument/2006/relationships">
+  <p:cSld>
+    <p:spTree>
+      <p:nvGrpSpPr>
+        <p:cNvPr id="1" name=""/>
+        <p:cNvGrpSpPr/>
+        <p:nvPr/>
+      </p:nvGrpSpPr>
+      <p:grpSpPr/>
+      <p:sp>
+        <p:nvSpPr>
+          <p:cNvPr id="2" name="Rectangle 1"/>
+          <p:cNvSpPr/>
+          <p:nvPr/>
+        </p:nvSpPr>
+        <p:spPr>
+          <a:xfrm>
+            <a:off x="0" y="0"/>
+            <a:ext cx="12191695" cy="6858000"/>
+          </a:xfrm>
+          <a:prstGeom prst="rect">
+            <a:avLst/>
+          </a:prstGeom>
+          <a:solidFill>
+            <a:srgbClr val="DFE8DF"/>
+          </a:solidFill>
+          <a:ln>
+            <a:noFill/>
+          </a:ln>
+        </p:spPr>
+        <p:style>
+          <a:lnRef idx="1">
+            <a:schemeClr val="accent1"/>
+          </a:lnRef>
+          <a:fillRef idx="3">
+            <a:schemeClr val="accent1"/>
+          </a:fillRef>
+          <a:effectRef idx="2">
+            <a:schemeClr val="accent1"/>
+          </a:effectRef>
+          <a:fontRef idx="minor">
+            <a:schemeClr val="lt1"/>
+          </a:fontRef>
+        </p:style>
+        <p:txBody>
+          <a:bodyPr rtlCol="0" anchor="ctr"/>
+          <a:lstStyle/>
+          <a:p>
+            <a:pPr algn="ctr"/>
+          </a:p>
+        </p:txBody>
+      </p:sp>
+      <p:sp>
+        <p:nvSpPr>
+          <p:cNvPr id="3" name="Rectangle 2"/>
+          <p:cNvSpPr/>
+          <p:nvPr/>
+        </p:nvSpPr>
+        <p:spPr>
+          <a:xfrm>
+            <a:off x="0" y="0"/>
+            <a:ext cx="12191695" cy="109728"/>
+          </a:xfrm>
+          <a:prstGeom prst="rect">
+            <a:avLst/>
+          </a:prstGeom>
+          <a:solidFill>
+            <a:srgbClr val="1F4F1F"/>
+          </a:solidFill>
+          <a:ln>
+            <a:noFill/>
+          </a:ln>
+        </p:spPr>
+        <p:style>
+          <a:lnRef idx="1">
+            <a:schemeClr val="accent1"/>
+          </a:lnRef>
+          <a:fillRef idx="3">
+            <a:schemeClr val="accent1"/>
+          </a:fillRef>
+          <a:effectRef idx="2">
+            <a:schemeClr val="accent1"/>
+          </a:effectRef>
+          <a:fontRef idx="minor">
+            <a:schemeClr val="lt1"/>
+          </a:fontRef>
+        </p:style>
+        <p:txBody>
+          <a:bodyPr rtlCol="0" anchor="ctr"/>
+          <a:lstStyle/>
+          <a:p>
+            <a:pPr algn="ctr"/>
+          </a:p>
+        </p:txBody>
+      </p:sp>
+      <p:sp>
+        <p:nvSpPr>
+          <p:cNvPr id="4" name="TextBox 3"/>
+          <p:cNvSpPr txBox="1"/>
+          <p:nvPr/>
+        </p:nvSpPr>
+        <p:spPr>
+          <a:xfrm>
+            <a:off x="777240" y="502920"/>
+            <a:ext cx="10515600" cy="640080"/>
+          </a:xfrm>
+          <a:prstGeom prst="rect">
+            <a:avLst/>
+          </a:prstGeom>
+          <a:noFill/>
+        </p:spPr>
+        <p:txBody>
+          <a:bodyPr wrap="none">
+            <a:spAutoFit/>
+          </a:bodyPr>
+          <a:lstStyle/>
+          <a:p>
+            <a:r>
+              <a:rPr sz="2600" b="1">
+                <a:solidFill>
+                  <a:srgbClr val="163816"/>
+                </a:solidFill>
+                <a:latin typeface="Segoe UI"/>
+              </a:rPr>
+              <a:t>2. What are you hoping to achieve?</a:t>
+            </a:r>
+          </a:p>
+        </p:txBody>
+      </p:sp>
+      <p:graphicFrame>
+        <p:nvGraphicFramePr>
+          <p:cNvPr id="5" name="Table 4"/>
+          <p:cNvGraphicFramePr>
+            <a:graphicFrameLocks noGrp="1"/>
+          </p:cNvGraphicFramePr>
+          <p:nvPr/>
+        </p:nvGraphicFramePr>
+        <p:xfrm>
+          <a:off x="777240" y="1188720"/>
+          <a:ext cx="10424160" cy="1828800"/>
+        </p:xfrm>
+        <a:graphic>
+          <a:graphicData uri="http://schemas.openxmlformats.org/drawingml/2006/table">
+            <a:tbl>
+              <a:tblPr firstRow="1" bandRow="1">
+                <a:tableStyleId>{5C22544A-7EE6-4342-B048-85BDC9FD1C3A}</a:tableStyleId>
+              </a:tblPr>
+              <a:tblGrid>
+                <a:gridCol w="5212080"/>
+                <a:gridCol w="5212080"/>
+              </a:tblGrid>
+              <a:tr h="365760">
+                <a:tc>
+                  <a:txBody>
+                    <a:bodyPr/>
+                    <a:lstStyle/>
+                    <a:p>
+                      <a:r>
+                        <a:rPr sz="1200" b="1">
+                          <a:solidFill>
+                            <a:srgbClr val="FFFFFF"/>
+                          </a:solidFill>
+                          <a:latin typeface="Segoe UI"/>
+                        </a:rPr>
+                        <a:t>Goal</a:t>
+                      </a:r>
+                    </a:p>
+                  </a:txBody>
+                  <a:tcPr>
+                    <a:solidFill>
+                      <a:srgbClr val="2D6A2D"/>
+                    </a:solidFill>
+                  </a:tcPr>
+                </a:tc>
+                <a:tc>
+                  <a:txBody>
+                    <a:bodyPr/>
+                    <a:lstStyle/>
+                    <a:p>
+                      <a:r>
+                        <a:rPr sz="1200" b="1">
+                          <a:solidFill>
+                            <a:srgbClr val="FFFFFF"/>
+                          </a:solidFill>
+                          <a:latin typeface="Segoe UI"/>
+                        </a:rPr>
+                        <a:t>Why</a:t>
+                      </a:r>
+                    </a:p>
+                  </a:txBody>
+                  <a:tcPr>
+                    <a:solidFill>
+                      <a:srgbClr val="2D6A2D"/>
+                    </a:solidFill>
+                  </a:tcPr>
+                </a:tc>
+              </a:tr>
+              <a:tr h="365760">
+                <a:tc>
+                  <a:txBody>
+                    <a:bodyPr/>
+                    <a:lstStyle/>
+                    <a:p>
+                      <a:r>
+                        <a:rPr sz="1100" b="0">
+                          <a:solidFill>
+                            <a:srgbClr val="1A2E1A"/>
+                          </a:solidFill>
+                          <a:latin typeface="Segoe UI"/>
+                        </a:rPr>
+                        <a:t>Fewer missed rhythm checks / drug intervals</a:t>
+                      </a:r>
+                    </a:p>
+                  </a:txBody>
+                  <a:tcPr/>
+                </a:tc>
+                <a:tc>
+                  <a:txBody>
+                    <a:bodyPr/>
+                    <a:lstStyle/>
+                    <a:p>
+                      <a:r>
+                        <a:rPr sz="1100" b="0">
+                          <a:solidFill>
+                            <a:srgbClr val="1A2E1A"/>
+                          </a:solidFill>
+                          <a:latin typeface="Segoe UI"/>
+                        </a:rPr>
+                        <a:t>Offloads time-keeping from working memory</a:t>
+                      </a:r>
+                    </a:p>
+                  </a:txBody>
+                  <a:tcPr/>
+                </a:tc>
+              </a:tr>
+              <a:tr h="365760">
+                <a:tc>
+                  <a:txBody>
+                    <a:bodyPr/>
+                    <a:lstStyle/>
+                    <a:p>
+                      <a:r>
+                        <a:rPr sz="1100" b="0">
+                          <a:solidFill>
+                            <a:srgbClr val="1A2E1A"/>
+                          </a:solidFill>
+                          <a:latin typeface="Segoe UI"/>
+                        </a:rPr>
+                        <a:t>Consistent contemporaneous log</a:t>
+                      </a:r>
+                    </a:p>
+                  </a:txBody>
+                  <a:tcPr/>
+                </a:tc>
+                <a:tc>
+                  <a:txBody>
+                    <a:bodyPr/>
+                    <a:lstStyle/>
+                    <a:p>
+                      <a:r>
+                        <a:rPr sz="1100" b="0">
+                          <a:solidFill>
+                            <a:srgbClr val="1A2E1A"/>
+                          </a:solidFill>
+                          <a:latin typeface="Segoe UI"/>
+                        </a:rPr>
+                        <a:t>Handover, debrief, governance</a:t>
+                      </a:r>
+                    </a:p>
+                  </a:txBody>
+                  <a:tcPr/>
+                </a:tc>
+              </a:tr>
+              <a:tr h="365760">
+                <a:tc>
+                  <a:txBody>
+                    <a:bodyPr/>
+                    <a:lstStyle/>
+                    <a:p>
+                      <a:r>
+                        <a:rPr sz="1100" b="0">
+                          <a:solidFill>
+                            <a:srgbClr val="1A2E1A"/>
+                          </a:solidFill>
+                          <a:latin typeface="Segoe UI"/>
+                        </a:rPr>
+                        <a:t>Structured end-of-case flows</a:t>
+                      </a:r>
+                    </a:p>
+                  </a:txBody>
+                  <a:tcPr/>
+                </a:tc>
+                <a:tc>
+                  <a:txBody>
+                    <a:bodyPr/>
+                    <a:lstStyle/>
+                    <a:p>
+                      <a:r>
+                        <a:rPr sz="1100" b="0">
+                          <a:solidFill>
+                            <a:srgbClr val="1A2E1A"/>
+                          </a:solidFill>
+                          <a:latin typeface="Segoe UI"/>
+                        </a:rPr>
+                        <a:t>ROSC, TOR, VoD, handover / transfer</a:t>
+                      </a:r>
+                    </a:p>
+                  </a:txBody>
+                  <a:tcPr/>
+                </a:tc>
+              </a:tr>
+              <a:tr h="365760">
+                <a:tc>
+                  <a:txBody>
+                    <a:bodyPr/>
+                    <a:lstStyle/>
+                    <a:p>
+                      <a:r>
+                        <a:rPr sz="1100" b="0">
+                          <a:solidFill>
+                            <a:srgbClr val="1A2E1A"/>
+                          </a:solidFill>
+                          <a:latin typeface="Segoe UI"/>
+                        </a:rPr>
+                        <a:t>Low-friction pilot evaluation</a:t>
+                      </a:r>
+                    </a:p>
+                  </a:txBody>
+                  <a:tcPr/>
+                </a:tc>
+                <a:tc>
+                  <a:txBody>
+                    <a:bodyPr/>
+                    <a:lstStyle/>
+                    <a:p>
+                      <a:r>
+                        <a:rPr sz="1100" b="0">
+                          <a:solidFill>
+                            <a:srgbClr val="1A2E1A"/>
+                          </a:solidFill>
+                          <a:latin typeface="Segoe UI"/>
+                        </a:rPr>
+                        <a:t>PWA on phone or tablet — no app store</a:t>
+                      </a:r>
+                    </a:p>
+                  </a:txBody>
+                  <a:tcPr/>
+                </a:tc>
+              </a:tr>
+            </a:tbl>
+          </a:graphicData>
+        </a:graphic>
+      </p:graphicFrame>
+    </p:spTree>
+  </p:cSld>
+  <p:clrMapOvr>
+    <a:masterClrMapping/>
+  </p:clrMapOvr>
+</p:sld>
+</file>
+
+<file path=ppt/slides/slide13.xml><?xml version="1.0" encoding="utf-8"?>
+<p:sld xmlns:a="http://schemas.openxmlformats.org/drawingml/2006/main" xmlns:p="http://schemas.openxmlformats.org/presentationml/2006/main" xmlns:r="http://schemas.openxmlformats.org/officeDocument/2006/relationships">
+  <p:cSld>
+    <p:spTree>
+      <p:nvGrpSpPr>
+        <p:cNvPr id="1" name=""/>
+        <p:cNvGrpSpPr/>
+        <p:nvPr/>
+      </p:nvGrpSpPr>
+      <p:grpSpPr/>
+      <p:sp>
+        <p:nvSpPr>
+          <p:cNvPr id="2" name="Rectangle 1"/>
+          <p:cNvSpPr/>
+          <p:nvPr/>
+        </p:nvSpPr>
+        <p:spPr>
+          <a:xfrm>
+            <a:off x="0" y="0"/>
+            <a:ext cx="12191695" cy="6858000"/>
+          </a:xfrm>
+          <a:prstGeom prst="rect">
+            <a:avLst/>
+          </a:prstGeom>
+          <a:solidFill>
+            <a:srgbClr val="DFE8DF"/>
+          </a:solidFill>
+          <a:ln>
+            <a:noFill/>
+          </a:ln>
+        </p:spPr>
+        <p:style>
+          <a:lnRef idx="1">
+            <a:schemeClr val="accent1"/>
+          </a:lnRef>
+          <a:fillRef idx="3">
+            <a:schemeClr val="accent1"/>
+          </a:fillRef>
+          <a:effectRef idx="2">
+            <a:schemeClr val="accent1"/>
+          </a:effectRef>
+          <a:fontRef idx="minor">
+            <a:schemeClr val="lt1"/>
+          </a:fontRef>
+        </p:style>
+        <p:txBody>
+          <a:bodyPr rtlCol="0" anchor="ctr"/>
+          <a:lstStyle/>
+          <a:p>
+            <a:pPr algn="ctr"/>
+          </a:p>
+        </p:txBody>
+      </p:sp>
+      <p:sp>
+        <p:nvSpPr>
+          <p:cNvPr id="3" name="Rectangle 2"/>
+          <p:cNvSpPr/>
+          <p:nvPr/>
+        </p:nvSpPr>
+        <p:spPr>
+          <a:xfrm>
+            <a:off x="0" y="0"/>
+            <a:ext cx="12191695" cy="109728"/>
+          </a:xfrm>
+          <a:prstGeom prst="rect">
+            <a:avLst/>
+          </a:prstGeom>
+          <a:solidFill>
+            <a:srgbClr val="1F4F1F"/>
+          </a:solidFill>
+          <a:ln>
+            <a:noFill/>
+          </a:ln>
+        </p:spPr>
+        <p:style>
+          <a:lnRef idx="1">
+            <a:schemeClr val="accent1"/>
+          </a:lnRef>
+          <a:fillRef idx="3">
+            <a:schemeClr val="accent1"/>
+          </a:fillRef>
+          <a:effectRef idx="2">
+            <a:schemeClr val="accent1"/>
+          </a:effectRef>
+          <a:fontRef idx="minor">
+            <a:schemeClr val="lt1"/>
+          </a:fontRef>
+        </p:style>
+        <p:txBody>
+          <a:bodyPr rtlCol="0" anchor="ctr"/>
+          <a:lstStyle/>
+          <a:p>
+            <a:pPr algn="ctr"/>
+          </a:p>
+        </p:txBody>
+      </p:sp>
+      <p:sp>
+        <p:nvSpPr>
+          <p:cNvPr id="4" name="TextBox 3"/>
+          <p:cNvSpPr txBox="1"/>
+          <p:nvPr/>
+        </p:nvSpPr>
+        <p:spPr>
+          <a:xfrm>
+            <a:off x="777240" y="502920"/>
+            <a:ext cx="10515600" cy="640080"/>
+          </a:xfrm>
+          <a:prstGeom prst="rect">
+            <a:avLst/>
+          </a:prstGeom>
+          <a:noFill/>
+        </p:spPr>
+        <p:txBody>
+          <a:bodyPr wrap="none">
+            <a:spAutoFit/>
+          </a:bodyPr>
+          <a:lstStyle/>
+          <a:p>
+            <a:r>
+              <a:rPr sz="2600" b="1">
+                <a:solidFill>
+                  <a:srgbClr val="163816"/>
+                </a:solidFill>
+                <a:latin typeface="Segoe UI"/>
+              </a:rPr>
+              <a:t>3. Are you trying to replace something?</a:t>
+            </a:r>
+          </a:p>
+        </p:txBody>
+      </p:sp>
+      <p:graphicFrame>
+        <p:nvGraphicFramePr>
+          <p:cNvPr id="5" name="Table 4"/>
+          <p:cNvGraphicFramePr>
+            <a:graphicFrameLocks noGrp="1"/>
+          </p:cNvGraphicFramePr>
+          <p:nvPr/>
+        </p:nvGraphicFramePr>
+        <p:xfrm>
+          <a:off x="777240" y="1188720"/>
+          <a:ext cx="10424160" cy="1828800"/>
+        </p:xfrm>
+        <a:graphic>
+          <a:graphicData uri="http://schemas.openxmlformats.org/drawingml/2006/table">
+            <a:tbl>
+              <a:tblPr firstRow="1" bandRow="1">
+                <a:tableStyleId>{5C22544A-7EE6-4342-B048-85BDC9FD1C3A}</a:tableStyleId>
+              </a:tblPr>
+              <a:tblGrid>
+                <a:gridCol w="5212080"/>
+                <a:gridCol w="5212080"/>
+              </a:tblGrid>
+              <a:tr h="365760">
+                <a:tc>
+                  <a:txBody>
+                    <a:bodyPr/>
+                    <a:lstStyle/>
+                    <a:p>
+                      <a:r>
+                        <a:rPr sz="1200" b="1">
+                          <a:solidFill>
+                            <a:srgbClr val="FFFFFF"/>
+                          </a:solidFill>
+                          <a:latin typeface="Segoe UI"/>
+                        </a:rPr>
+                        <a:t>Today</a:t>
+                      </a:r>
+                    </a:p>
+                  </a:txBody>
+                  <a:tcPr>
+                    <a:solidFill>
+                      <a:srgbClr val="2D6A2D"/>
+                    </a:solidFill>
+                  </a:tcPr>
+                </a:tc>
+                <a:tc>
+                  <a:txBody>
+                    <a:bodyPr/>
+                    <a:lstStyle/>
+                    <a:p>
+                      <a:r>
+                        <a:rPr sz="1200" b="1">
+                          <a:solidFill>
+                            <a:srgbClr val="FFFFFF"/>
+                          </a:solidFill>
+                          <a:latin typeface="Segoe UI"/>
+                        </a:rPr>
+                        <a:t>Resusci-Time</a:t>
+                      </a:r>
+                    </a:p>
+                  </a:txBody>
+                  <a:tcPr>
+                    <a:solidFill>
+                      <a:srgbClr val="2D6A2D"/>
+                    </a:solidFill>
+                  </a:tcPr>
+                </a:tc>
+              </a:tr>
+              <a:tr h="365760">
+                <a:tc>
+                  <a:txBody>
+                    <a:bodyPr/>
+                    <a:lstStyle/>
+                    <a:p>
+                      <a:r>
+                        <a:rPr sz="1100" b="0">
+                          <a:solidFill>
+                            <a:srgbClr val="1A2E1A"/>
+                          </a:solidFill>
+                          <a:latin typeface="Segoe UI"/>
+                        </a:rPr>
+                        <a:t>JRCALC / paper protocols</a:t>
+                      </a:r>
+                    </a:p>
+                  </a:txBody>
+                  <a:tcPr/>
+                </a:tc>
+                <a:tc>
+                  <a:txBody>
+                    <a:bodyPr/>
+                    <a:lstStyle/>
+                    <a:p>
+                      <a:r>
+                        <a:rPr sz="1100" b="0">
+                          <a:solidFill>
+                            <a:srgbClr val="1A2E1A"/>
+                          </a:solidFill>
+                          <a:latin typeface="Segoe UI"/>
+                        </a:rPr>
+                        <a:t>Same guidance — adds active timer + log</a:t>
+                      </a:r>
+                    </a:p>
+                  </a:txBody>
+                  <a:tcPr/>
+                </a:tc>
+              </a:tr>
+              <a:tr h="365760">
+                <a:tc>
+                  <a:txBody>
+                    <a:bodyPr/>
+                    <a:lstStyle/>
+                    <a:p>
+                      <a:r>
+                        <a:rPr sz="1100" b="0">
+                          <a:solidFill>
+                            <a:srgbClr val="1A2E1A"/>
+                          </a:solidFill>
+                          <a:latin typeface="Segoe UI"/>
+                        </a:rPr>
+                        <a:t>Informal timing / mental tracking</a:t>
+                      </a:r>
+                    </a:p>
+                  </a:txBody>
+                  <a:tcPr/>
+                </a:tc>
+                <a:tc>
+                  <a:txBody>
+                    <a:bodyPr/>
+                    <a:lstStyle/>
+                    <a:p>
+                      <a:r>
+                        <a:rPr sz="1100" b="0">
+                          <a:solidFill>
+                            <a:srgbClr val="1A2E1A"/>
+                          </a:solidFill>
+                          <a:latin typeface="Segoe UI"/>
+                        </a:rPr>
+                        <a:t>Supplements, does not remove team leader role</a:t>
+                      </a:r>
+                    </a:p>
+                  </a:txBody>
+                  <a:tcPr/>
+                </a:tc>
+              </a:tr>
+              <a:tr h="365760">
+                <a:tc>
+                  <a:txBody>
+                    <a:bodyPr/>
+                    <a:lstStyle/>
+                    <a:p>
+                      <a:r>
+                        <a:rPr sz="1100" b="0">
+                          <a:solidFill>
+                            <a:srgbClr val="1A2E1A"/>
+                          </a:solidFill>
+                          <a:latin typeface="Segoe UI"/>
+                        </a:rPr>
+                        <a:t>EPR / PRF</a:t>
+                      </a:r>
+                    </a:p>
+                  </a:txBody>
+                  <a:tcPr/>
+                </a:tc>
+                <a:tc>
+                  <a:txBody>
+                    <a:bodyPr/>
+                    <a:lstStyle/>
+                    <a:p>
+                      <a:r>
+                        <a:rPr sz="1100" b="0">
+                          <a:solidFill>
+                            <a:srgbClr val="1A2E1A"/>
+                          </a:solidFill>
+                          <a:latin typeface="Segoe UI"/>
+                        </a:rPr>
+                        <a:t>Export may help after the event — not a replacement</a:t>
+                      </a:r>
+                    </a:p>
+                  </a:txBody>
+                  <a:tcPr/>
+                </a:tc>
+              </a:tr>
+              <a:tr h="365760">
+                <a:tc>
+                  <a:txBody>
+                    <a:bodyPr/>
+                    <a:lstStyle/>
+                    <a:p>
+                      <a:r>
+                        <a:rPr sz="1100" b="0">
+                          <a:solidFill>
+                            <a:srgbClr val="1A2E1A"/>
+                          </a:solidFill>
+                          <a:latin typeface="Segoe UI"/>
+                        </a:rPr>
+                        <a:t>Another mandated arrest app</a:t>
+                      </a:r>
+                    </a:p>
+                  </a:txBody>
+                  <a:tcPr/>
+                </a:tc>
+                <a:tc>
+                  <a:txBody>
+                    <a:bodyPr/>
+                    <a:lstStyle/>
+                    <a:p>
+                      <a:r>
+                        <a:rPr sz="1100" b="0">
+                          <a:solidFill>
+                            <a:srgbClr val="1A2E1A"/>
+                          </a:solidFill>
+                          <a:latin typeface="Segoe UI"/>
+                        </a:rPr>
+                        <a:t>Only relevant if trust already mandates one</a:t>
+                      </a:r>
+                    </a:p>
+                  </a:txBody>
+                  <a:tcPr/>
+                </a:tc>
+              </a:tr>
+            </a:tbl>
+          </a:graphicData>
+        </a:graphic>
+      </p:graphicFrame>
+      <p:sp>
+        <p:nvSpPr>
+          <p:cNvPr id="6" name="TextBox 5"/>
+          <p:cNvSpPr txBox="1"/>
+          <p:nvPr/>
+        </p:nvSpPr>
+        <p:spPr>
+          <a:xfrm>
+            <a:off x="777240" y="5897880"/>
+            <a:ext cx="10424160" cy="502920"/>
+          </a:xfrm>
+          <a:prstGeom prst="rect">
+            <a:avLst/>
+          </a:prstGeom>
+          <a:noFill/>
+        </p:spPr>
+        <p:txBody>
+          <a:bodyPr wrap="none">
+            <a:spAutoFit/>
+          </a:bodyPr>
+          <a:lstStyle/>
+          <a:p>
+            <a:r>
+              <a:rPr sz="1200" b="0">
+                <a:solidFill>
+                  <a:srgbClr val="4A5F4A"/>
+                </a:solidFill>
+                <a:latin typeface="Segoe UI"/>
+              </a:rPr>
+              <a:t>Optional aide for timing, prompts, and logging — not a swap for authoritative sources.</a:t>
+            </a:r>
+          </a:p>
+        </p:txBody>
+      </p:sp>
+    </p:spTree>
+  </p:cSld>
+  <p:clrMapOvr>
+    <a:masterClrMapping/>
+  </p:clrMapOvr>
+</p:sld>
+</file>
+
+<file path=ppt/slides/slide14.xml><?xml version="1.0" encoding="utf-8"?>
+<p:sld xmlns:a="http://schemas.openxmlformats.org/drawingml/2006/main" xmlns:p="http://schemas.openxmlformats.org/presentationml/2006/main" xmlns:r="http://schemas.openxmlformats.org/officeDocument/2006/relationships">
+  <p:cSld>
+    <p:spTree>
+      <p:nvGrpSpPr>
+        <p:cNvPr id="1" name=""/>
+        <p:cNvGrpSpPr/>
+        <p:nvPr/>
+      </p:nvGrpSpPr>
+      <p:grpSpPr/>
+      <p:sp>
+        <p:nvSpPr>
+          <p:cNvPr id="2" name="Rectangle 1"/>
+          <p:cNvSpPr/>
+          <p:nvPr/>
+        </p:nvSpPr>
+        <p:spPr>
+          <a:xfrm>
+            <a:off x="0" y="0"/>
+            <a:ext cx="12191695" cy="6858000"/>
+          </a:xfrm>
+          <a:prstGeom prst="rect">
+            <a:avLst/>
+          </a:prstGeom>
+          <a:solidFill>
+            <a:srgbClr val="DFE8DF"/>
+          </a:solidFill>
+          <a:ln>
+            <a:noFill/>
+          </a:ln>
+        </p:spPr>
+        <p:style>
+          <a:lnRef idx="1">
+            <a:schemeClr val="accent1"/>
+          </a:lnRef>
+          <a:fillRef idx="3">
+            <a:schemeClr val="accent1"/>
+          </a:fillRef>
+          <a:effectRef idx="2">
+            <a:schemeClr val="accent1"/>
+          </a:effectRef>
+          <a:fontRef idx="minor">
+            <a:schemeClr val="lt1"/>
+          </a:fontRef>
+        </p:style>
+        <p:txBody>
+          <a:bodyPr rtlCol="0" anchor="ctr"/>
+          <a:lstStyle/>
+          <a:p>
+            <a:pPr algn="ctr"/>
+          </a:p>
+        </p:txBody>
+      </p:sp>
+      <p:sp>
+        <p:nvSpPr>
+          <p:cNvPr id="3" name="Rectangle 2"/>
+          <p:cNvSpPr/>
+          <p:nvPr/>
+        </p:nvSpPr>
+        <p:spPr>
+          <a:xfrm>
+            <a:off x="0" y="0"/>
+            <a:ext cx="12191695" cy="109728"/>
+          </a:xfrm>
+          <a:prstGeom prst="rect">
+            <a:avLst/>
+          </a:prstGeom>
+          <a:solidFill>
+            <a:srgbClr val="1F4F1F"/>
+          </a:solidFill>
+          <a:ln>
+            <a:noFill/>
+          </a:ln>
+        </p:spPr>
+        <p:style>
+          <a:lnRef idx="1">
+            <a:schemeClr val="accent1"/>
+          </a:lnRef>
+          <a:fillRef idx="3">
+            <a:schemeClr val="accent1"/>
+          </a:fillRef>
+          <a:effectRef idx="2">
+            <a:schemeClr val="accent1"/>
+          </a:effectRef>
+          <a:fontRef idx="minor">
+            <a:schemeClr val="lt1"/>
+          </a:fontRef>
+        </p:style>
+        <p:txBody>
+          <a:bodyPr rtlCol="0" anchor="ctr"/>
+          <a:lstStyle/>
+          <a:p>
+            <a:pPr algn="ctr"/>
+          </a:p>
+        </p:txBody>
+      </p:sp>
+      <p:sp>
+        <p:nvSpPr>
+          <p:cNvPr id="4" name="TextBox 3"/>
+          <p:cNvSpPr txBox="1"/>
+          <p:nvPr/>
+        </p:nvSpPr>
+        <p:spPr>
+          <a:xfrm>
+            <a:off x="777240" y="502920"/>
+            <a:ext cx="10515600" cy="640080"/>
+          </a:xfrm>
+          <a:prstGeom prst="rect">
+            <a:avLst/>
+          </a:prstGeom>
+          <a:noFill/>
+        </p:spPr>
+        <p:txBody>
+          <a:bodyPr wrap="none">
+            <a:spAutoFit/>
+          </a:bodyPr>
+          <a:lstStyle/>
+          <a:p>
+            <a:r>
+              <a:rPr sz="2600" b="1">
+                <a:solidFill>
+                  <a:srgbClr val="163816"/>
+                </a:solidFill>
+                <a:latin typeface="Segoe UI"/>
+              </a:rPr>
+              <a:t>4. Cognitive load — reduce or increase?</a:t>
+            </a:r>
+          </a:p>
+        </p:txBody>
+      </p:sp>
+      <p:graphicFrame>
+        <p:nvGraphicFramePr>
+          <p:cNvPr id="5" name="Table 4"/>
+          <p:cNvGraphicFramePr>
+            <a:graphicFrameLocks noGrp="1"/>
+          </p:cNvGraphicFramePr>
+          <p:nvPr/>
+        </p:nvGraphicFramePr>
+        <p:xfrm>
+          <a:off x="777240" y="1188720"/>
+          <a:ext cx="10424160" cy="1828800"/>
+        </p:xfrm>
+        <a:graphic>
+          <a:graphicData uri="http://schemas.openxmlformats.org/drawingml/2006/table">
+            <a:tbl>
+              <a:tblPr firstRow="1" bandRow="1">
+                <a:tableStyleId>{5C22544A-7EE6-4342-B048-85BDC9FD1C3A}</a:tableStyleId>
+              </a:tblPr>
+              <a:tblGrid>
+                <a:gridCol w="5212080"/>
+                <a:gridCol w="5212080"/>
+              </a:tblGrid>
+              <a:tr h="365760">
+                <a:tc>
+                  <a:txBody>
+                    <a:bodyPr/>
+                    <a:lstStyle/>
+                    <a:p>
+                      <a:r>
+                        <a:rPr sz="1200" b="1">
+                          <a:solidFill>
+                            <a:srgbClr val="FFFFFF"/>
+                          </a:solidFill>
+                          <a:latin typeface="Segoe UI"/>
+                        </a:rPr>
+                        <a:t>Reduces</a:t>
+                      </a:r>
+                    </a:p>
+                  </a:txBody>
+                  <a:tcPr>
+                    <a:solidFill>
+                      <a:srgbClr val="2D6A2D"/>
+                    </a:solidFill>
+                  </a:tcPr>
+                </a:tc>
+                <a:tc>
+                  <a:txBody>
+                    <a:bodyPr/>
+                    <a:lstStyle/>
+                    <a:p>
+                      <a:r>
+                        <a:rPr sz="1200" b="1">
+                          <a:solidFill>
+                            <a:srgbClr val="FFFFFF"/>
+                          </a:solidFill>
+                          <a:latin typeface="Segoe UI"/>
+                        </a:rPr>
+                        <a:t>Risks if misused</a:t>
+                      </a:r>
+                    </a:p>
+                  </a:txBody>
+                  <a:tcPr>
+                    <a:solidFill>
+                      <a:srgbClr val="2D6A2D"/>
+                    </a:solidFill>
+                  </a:tcPr>
+                </a:tc>
+              </a:tr>
+              <a:tr h="365760">
+                <a:tc>
+                  <a:txBody>
+                    <a:bodyPr/>
+                    <a:lstStyle/>
+                    <a:p>
+                      <a:r>
+                        <a:rPr sz="1100" b="0">
+                          <a:solidFill>
+                            <a:srgbClr val="1A2E1A"/>
+                          </a:solidFill>
+                          <a:latin typeface="Segoe UI"/>
+                        </a:rPr>
+                        <a:t>One shared clock + due prompts</a:t>
+                      </a:r>
+                    </a:p>
+                  </a:txBody>
+                  <a:tcPr/>
+                </a:tc>
+                <a:tc>
+                  <a:txBody>
+                    <a:bodyPr/>
+                    <a:lstStyle/>
+                    <a:p>
+                      <a:r>
+                        <a:rPr sz="1100" b="0">
+                          <a:solidFill>
+                            <a:srgbClr val="1A2E1A"/>
+                          </a:solidFill>
+                          <a:latin typeface="Segoe UI"/>
+                        </a:rPr>
+                        <a:t>Extra screen during hands-on care</a:t>
+                      </a:r>
+                    </a:p>
+                  </a:txBody>
+                  <a:tcPr/>
+                </a:tc>
+              </a:tr>
+              <a:tr h="365760">
+                <a:tc>
+                  <a:txBody>
+                    <a:bodyPr/>
+                    <a:lstStyle/>
+                    <a:p>
+                      <a:r>
+                        <a:rPr sz="1100" b="0">
+                          <a:solidFill>
+                            <a:srgbClr val="1A2E1A"/>
+                          </a:solidFill>
+                          <a:latin typeface="Segoe UI"/>
+                        </a:rPr>
+                        <a:t>Externalised checklists (4 Hs / 4 Ts, ROSC)</a:t>
+                      </a:r>
+                    </a:p>
+                  </a:txBody>
+                  <a:tcPr/>
+                </a:tc>
+                <a:tc>
+                  <a:txBody>
+                    <a:bodyPr/>
+                    <a:lstStyle/>
+                    <a:p>
+                      <a:r>
+                        <a:rPr sz="1100" b="0">
+                          <a:solidFill>
+                            <a:srgbClr val="1A2E1A"/>
+                          </a:solidFill>
+                          <a:latin typeface="Segoe UI"/>
+                        </a:rPr>
+                        <a:t>Logging takes seconds — scribe role</a:t>
+                      </a:r>
+                    </a:p>
+                  </a:txBody>
+                  <a:tcPr/>
+                </a:tc>
+              </a:tr>
+              <a:tr h="365760">
+                <a:tc>
+                  <a:txBody>
+                    <a:bodyPr/>
+                    <a:lstStyle/>
+                    <a:p>
+                      <a:r>
+                        <a:rPr sz="1100" b="0">
+                          <a:solidFill>
+                            <a:srgbClr val="1A2E1A"/>
+                          </a:solidFill>
+                          <a:latin typeface="Segoe UI"/>
+                        </a:rPr>
+                        <a:t>Less mental arithmetic on drug timing</a:t>
+                      </a:r>
+                    </a:p>
+                  </a:txBody>
+                  <a:tcPr/>
+                </a:tc>
+                <a:tc>
+                  <a:txBody>
+                    <a:bodyPr/>
+                    <a:lstStyle/>
+                    <a:p>
+                      <a:r>
+                        <a:rPr sz="1100" b="0">
+                          <a:solidFill>
+                            <a:srgbClr val="1A2E1A"/>
+                          </a:solidFill>
+                          <a:latin typeface="Segoe UI"/>
+                        </a:rPr>
+                        <a:t>Wrong initial rhythm → wrong branch</a:t>
+                      </a:r>
+                    </a:p>
+                  </a:txBody>
+                  <a:tcPr/>
+                </a:tc>
+              </a:tr>
+              <a:tr h="365760">
+                <a:tc>
+                  <a:txBody>
+                    <a:bodyPr/>
+                    <a:lstStyle/>
+                    <a:p>
+                      <a:r>
+                        <a:rPr sz="1100" b="0">
+                          <a:solidFill>
+                            <a:srgbClr val="1A2E1A"/>
+                          </a:solidFill>
+                          <a:latin typeface="Segoe UI"/>
+                        </a:rPr>
+                        <a:t>Shared reference if crew changes</a:t>
+                      </a:r>
+                    </a:p>
+                  </a:txBody>
+                  <a:tcPr/>
+                </a:tc>
+                <a:tc>
+                  <a:txBody>
+                    <a:bodyPr/>
+                    <a:lstStyle/>
+                    <a:p>
+                      <a:r>
+                        <a:rPr sz="1100" b="0">
+                          <a:solidFill>
+                            <a:srgbClr val="1A2E1A"/>
+                          </a:solidFill>
+                          <a:latin typeface="Segoe UI"/>
+                        </a:rPr>
+                        <a:t>Principle: one person runs the app</a:t>
+                      </a:r>
+                    </a:p>
+                  </a:txBody>
+                  <a:tcPr/>
+                </a:tc>
+              </a:tr>
+            </a:tbl>
+          </a:graphicData>
+        </a:graphic>
+      </p:graphicFrame>
+    </p:spTree>
+  </p:cSld>
+  <p:clrMapOvr>
+    <a:masterClrMapping/>
+  </p:clrMapOvr>
+</p:sld>
+</file>
+
+<file path=ppt/slides/slide15.xml><?xml version="1.0" encoding="utf-8"?>
 <p:sld xmlns:a="http://schemas.openxmlformats.org/drawingml/2006/main" xmlns:p="http://schemas.openxmlformats.org/presentationml/2006/main" xmlns:r="http://schemas.openxmlformats.org/officeDocument/2006/relationships">
   <p:cSld>
     <p:spTree>
@@ -3710,7 +5258,7 @@
 </p:sld>
 </file>
 
-<file path=ppt/slides/slide11.xml><?xml version="1.0" encoding="utf-8"?>
+<file path=ppt/slides/slide16.xml><?xml version="1.0" encoding="utf-8"?>
 <p:sld xmlns:a="http://schemas.openxmlformats.org/drawingml/2006/main" xmlns:p="http://schemas.openxmlformats.org/presentationml/2006/main" xmlns:r="http://schemas.openxmlformats.org/officeDocument/2006/relationships">
   <p:cSld>
     <p:spTree>
@@ -3935,7 +5483,7 @@
 </p:sld>
 </file>
 
-<file path=ppt/slides/slide12.xml><?xml version="1.0" encoding="utf-8"?>
+<file path=ppt/slides/slide17.xml><?xml version="1.0" encoding="utf-8"?>
 <p:sld xmlns:a="http://schemas.openxmlformats.org/drawingml/2006/main" xmlns:p="http://schemas.openxmlformats.org/presentationml/2006/main" xmlns:r="http://schemas.openxmlformats.org/officeDocument/2006/relationships">
   <p:cSld>
     <p:spTree>
@@ -4084,8 +5632,9 @@
                 <a:tableStyleId>{5C22544A-7EE6-4342-B048-85BDC9FD1C3A}</a:tableStyleId>
               </a:tblPr>
               <a:tblGrid>
-                <a:gridCol w="5212080"/>
-                <a:gridCol w="5212080"/>
+                <a:gridCol w="3474720"/>
+                <a:gridCol w="3474720"/>
+                <a:gridCol w="3474720"/>
               </a:tblGrid>
               <a:tr h="365760">
                 <a:tc>
@@ -4094,7 +5643,7 @@
                     <a:lstStyle/>
                     <a:p>
                       <a:r>
-                        <a:rPr sz="1100" b="1">
+                        <a:rPr sz="1000" b="1">
                           <a:solidFill>
                             <a:srgbClr val="FFFFFF"/>
                           </a:solidFill>
@@ -4116,13 +5665,13 @@
                     <a:lstStyle/>
                     <a:p>
                       <a:r>
-                        <a:rPr sz="1100" b="1">
+                        <a:rPr sz="1000" b="1">
                           <a:solidFill>
                             <a:srgbClr val="FFFFFF"/>
                           </a:solidFill>
                           <a:latin typeface="Segoe UI"/>
                         </a:rPr>
-                        <a:t>What it does (simple language)</a:t>
+                        <a:t>Role in the app</a:t>
                       </a:r>
                     </a:p>
                   </a:txBody>
@@ -4132,6 +5681,28 @@
                     </a:solidFill>
                   </a:tcPr>
                 </a:tc>
+                <a:tc>
+                  <a:txBody>
+                    <a:bodyPr/>
+                    <a:lstStyle/>
+                    <a:p>
+                      <a:r>
+                        <a:rPr sz="1000" b="1">
+                          <a:solidFill>
+                            <a:srgbClr val="FFFFFF"/>
+                          </a:solidFill>
+                          <a:latin typeface="Segoe UI"/>
+                        </a:rPr>
+                        <a:t>Real-life analogy</a:t>
+                      </a:r>
+                    </a:p>
+                  </a:txBody>
+                  <a:tcPr>
+                    <a:solidFill>
+                      <a:srgbClr val="2D6A2D"/>
+                    </a:solidFill>
+                  </a:tcPr>
+                </a:tc>
               </a:tr>
               <a:tr h="365760">
                 <a:tc>
@@ -4140,7 +5711,7 @@
                     <a:lstStyle/>
                     <a:p>
                       <a:r>
-                        <a:rPr sz="1000" b="0">
+                        <a:rPr sz="900" b="0">
                           <a:solidFill>
                             <a:srgbClr val="1A2E1A"/>
                           </a:solidFill>
@@ -4158,13 +5729,31 @@
                     <a:lstStyle/>
                     <a:p>
                       <a:r>
-                        <a:rPr sz="1000" b="0">
-                          <a:solidFill>
-                            <a:srgbClr val="1A2E1A"/>
-                          </a:solidFill>
-                          <a:latin typeface="Segoe UI"/>
-                        </a:rPr>
-                        <a:t>The code that draws the screens and responds when you tap buttons</a:t>
+                        <a:rPr sz="900" b="0">
+                          <a:solidFill>
+                            <a:srgbClr val="1A2E1A"/>
+                          </a:solidFill>
+                          <a:latin typeface="Segoe UI"/>
+                        </a:rPr>
+                        <a:t>Draws screens and responds when you tap buttons</a:t>
+                      </a:r>
+                    </a:p>
+                  </a:txBody>
+                  <a:tcPr/>
+                </a:tc>
+                <a:tc>
+                  <a:txBody>
+                    <a:bodyPr/>
+                    <a:lstStyle/>
+                    <a:p>
+                      <a:r>
+                        <a:rPr sz="900" b="0">
+                          <a:solidFill>
+                            <a:srgbClr val="1A2E1A"/>
+                          </a:solidFill>
+                          <a:latin typeface="Segoe UI"/>
+                        </a:rPr>
+                        <a:t>Like the controls and display on a defib — what the crew sees and presses</a:t>
                       </a:r>
                     </a:p>
                   </a:txBody>
@@ -4178,7 +5767,7 @@
                     <a:lstStyle/>
                     <a:p>
                       <a:r>
-                        <a:rPr sz="1000" b="0">
+                        <a:rPr sz="900" b="0">
                           <a:solidFill>
                             <a:srgbClr val="1A2E1A"/>
                           </a:solidFill>
@@ -4196,13 +5785,31 @@
                     <a:lstStyle/>
                     <a:p>
                       <a:r>
-                        <a:rPr sz="1000" b="0">
-                          <a:solidFill>
-                            <a:srgbClr val="1A2E1A"/>
-                          </a:solidFill>
-                          <a:latin typeface="Segoe UI"/>
-                        </a:rPr>
-                        <a:t>Packages the app into files a phone or tablet browser can load</a:t>
+                        <a:rPr sz="900" b="0">
+                          <a:solidFill>
+                            <a:srgbClr val="1A2E1A"/>
+                          </a:solidFill>
+                          <a:latin typeface="Segoe UI"/>
+                        </a:rPr>
+                        <a:t>Packages the app into files a browser can load</a:t>
+                      </a:r>
+                    </a:p>
+                  </a:txBody>
+                  <a:tcPr/>
+                </a:tc>
+                <a:tc>
+                  <a:txBody>
+                    <a:bodyPr/>
+                    <a:lstStyle/>
+                    <a:p>
+                      <a:r>
+                        <a:rPr sz="900" b="0">
+                          <a:solidFill>
+                            <a:srgbClr val="1A2E1A"/>
+                          </a:solidFill>
+                          <a:latin typeface="Segoe UI"/>
+                        </a:rPr>
+                        <a:t>Like assembling the protocol pack into something crews can open on shift</a:t>
                       </a:r>
                     </a:p>
                   </a:txBody>
@@ -4216,7 +5823,7 @@
                     <a:lstStyle/>
                     <a:p>
                       <a:r>
-                        <a:rPr sz="1000" b="0">
+                        <a:rPr sz="900" b="0">
                           <a:solidFill>
                             <a:srgbClr val="1A2E1A"/>
                           </a:solidFill>
@@ -4234,13 +5841,31 @@
                     <a:lstStyle/>
                     <a:p>
                       <a:r>
-                        <a:rPr sz="1000" b="0">
+                        <a:rPr sz="900" b="0">
                           <a:solidFill>
                             <a:srgbClr val="1A2E1A"/>
                           </a:solidFill>
                           <a:latin typeface="Segoe UI"/>
                         </a:rPr>
                         <a:t>Add to home screen — opens full-screen like a normal app</a:t>
+                      </a:r>
+                    </a:p>
+                  </a:txBody>
+                  <a:tcPr/>
+                </a:tc>
+                <a:tc>
+                  <a:txBody>
+                    <a:bodyPr/>
+                    <a:lstStyle/>
+                    <a:p>
+                      <a:r>
+                        <a:rPr sz="900" b="0">
+                          <a:solidFill>
+                            <a:srgbClr val="1A2E1A"/>
+                          </a:solidFill>
+                          <a:latin typeface="Segoe UI"/>
+                        </a:rPr>
+                        <a:t>Like pinning the ALS algorithm to your tablet home screen</a:t>
                       </a:r>
                     </a:p>
                   </a:txBody>
@@ -4254,7 +5879,7 @@
                     <a:lstStyle/>
                     <a:p>
                       <a:r>
-                        <a:rPr sz="1000" b="0">
+                        <a:rPr sz="900" b="0">
                           <a:solidFill>
                             <a:srgbClr val="1A2E1A"/>
                           </a:solidFill>
@@ -4272,13 +5897,31 @@
                     <a:lstStyle/>
                     <a:p>
                       <a:r>
-                        <a:rPr sz="1000" b="0">
-                          <a:solidFill>
-                            <a:srgbClr val="1A2E1A"/>
-                          </a:solidFill>
-                          <a:latin typeface="Segoe UI"/>
-                        </a:rPr>
-                        <a:t>Saves a copy on the device so it works offline after first visit</a:t>
+                        <a:rPr sz="900" b="0">
+                          <a:solidFill>
+                            <a:srgbClr val="1A2E1A"/>
+                          </a:solidFill>
+                          <a:latin typeface="Segoe UI"/>
+                        </a:rPr>
+                        <a:t>Keeps a copy on the device for offline use after first visit</a:t>
+                      </a:r>
+                    </a:p>
+                  </a:txBody>
+                  <a:tcPr/>
+                </a:tc>
+                <a:tc>
+                  <a:txBody>
+                    <a:bodyPr/>
+                    <a:lstStyle/>
+                    <a:p>
+                      <a:r>
+                        <a:rPr sz="900" b="0">
+                          <a:solidFill>
+                            <a:srgbClr val="1A2E1A"/>
+                          </a:solidFill>
+                          <a:latin typeface="Segoe UI"/>
+                        </a:rPr>
+                        <a:t>Like keeping a laminated protocol in the ambulance — still there with no signal</a:t>
                       </a:r>
                     </a:p>
                   </a:txBody>
@@ -4292,7 +5935,7 @@
                     <a:lstStyle/>
                     <a:p>
                       <a:r>
-                        <a:rPr sz="1000" b="0">
+                        <a:rPr sz="900" b="0">
                           <a:solidFill>
                             <a:srgbClr val="1A2E1A"/>
                           </a:solidFill>
@@ -4310,13 +5953,31 @@
                     <a:lstStyle/>
                     <a:p>
                       <a:r>
-                        <a:rPr sz="1000" b="0">
-                          <a:solidFill>
-                            <a:srgbClr val="1A2E1A"/>
-                          </a:solidFill>
-                          <a:latin typeface="Segoe UI"/>
-                        </a:rPr>
-                        <a:t>Stores saved logs on this device only — not in the cloud</a:t>
+                        <a:rPr sz="900" b="0">
+                          <a:solidFill>
+                            <a:srgbClr val="1A2E1A"/>
+                          </a:solidFill>
+                          <a:latin typeface="Segoe UI"/>
+                        </a:rPr>
+                        <a:t>Stores saved logs on this device only</a:t>
+                      </a:r>
+                    </a:p>
+                  </a:txBody>
+                  <a:tcPr/>
+                </a:tc>
+                <a:tc>
+                  <a:txBody>
+                    <a:bodyPr/>
+                    <a:lstStyle/>
+                    <a:p>
+                      <a:r>
+                        <a:rPr sz="900" b="0">
+                          <a:solidFill>
+                            <a:srgbClr val="1A2E1A"/>
+                          </a:solidFill>
+                          <a:latin typeface="Segoe UI"/>
+                        </a:rPr>
+                        <a:t>Like a notebook that stays in the vehicle — not sent to a server</a:t>
                       </a:r>
                     </a:p>
                   </a:txBody>
@@ -4330,7 +5991,7 @@
                     <a:lstStyle/>
                     <a:p>
                       <a:r>
-                        <a:rPr sz="1000" b="0">
+                        <a:rPr sz="900" b="0">
                           <a:solidFill>
                             <a:srgbClr val="1A2E1A"/>
                           </a:solidFill>
@@ -4348,13 +6009,31 @@
                     <a:lstStyle/>
                     <a:p>
                       <a:r>
-                        <a:rPr sz="1000" b="0">
-                          <a:solidFill>
-                            <a:srgbClr val="1A2E1A"/>
-                          </a:solidFill>
-                          <a:latin typeface="Segoe UI"/>
-                        </a:rPr>
-                        <a:t>During a case nothing is uploaded; privacy by design</a:t>
+                        <a:rPr sz="900" b="0">
+                          <a:solidFill>
+                            <a:srgbClr val="1A2E1A"/>
+                          </a:solidFill>
+                          <a:latin typeface="Segoe UI"/>
+                        </a:rPr>
+                        <a:t>During a case nothing is uploaded</a:t>
+                      </a:r>
+                    </a:p>
+                  </a:txBody>
+                  <a:tcPr/>
+                </a:tc>
+                <a:tc>
+                  <a:txBody>
+                    <a:bodyPr/>
+                    <a:lstStyle/>
+                    <a:p>
+                      <a:r>
+                        <a:rPr sz="900" b="0">
+                          <a:solidFill>
+                            <a:srgbClr val="1A2E1A"/>
+                          </a:solidFill>
+                          <a:latin typeface="Segoe UI"/>
+                        </a:rPr>
+                        <a:t>Like a paper PRF that never leaves the crew’s hands until they choose to export</a:t>
                       </a:r>
                     </a:p>
                   </a:txBody>
@@ -4368,7 +6047,7 @@
                     <a:lstStyle/>
                     <a:p>
                       <a:r>
-                        <a:rPr sz="1000" b="0">
+                        <a:rPr sz="900" b="0">
                           <a:solidFill>
                             <a:srgbClr val="1A2E1A"/>
                           </a:solidFill>
@@ -4386,13 +6065,31 @@
                     <a:lstStyle/>
                     <a:p>
                       <a:r>
-                        <a:rPr sz="1000" b="0">
-                          <a:solidFill>
-                            <a:srgbClr val="1A2E1A"/>
-                          </a:solidFill>
-                          <a:latin typeface="Segoe UI"/>
-                        </a:rPr>
-                        <a:t>Turns the event log into a PDF you can save or share</a:t>
+                        <a:rPr sz="900" b="0">
+                          <a:solidFill>
+                            <a:srgbClr val="1A2E1A"/>
+                          </a:solidFill>
+                          <a:latin typeface="Segoe UI"/>
+                        </a:rPr>
+                        <a:t>Turns the event log into a PDF</a:t>
+                      </a:r>
+                    </a:p>
+                  </a:txBody>
+                  <a:tcPr/>
+                </a:tc>
+                <a:tc>
+                  <a:txBody>
+                    <a:bodyPr/>
+                    <a:lstStyle/>
+                    <a:p>
+                      <a:r>
+                        <a:rPr sz="900" b="0">
+                          <a:solidFill>
+                            <a:srgbClr val="1A2E1A"/>
+                          </a:solidFill>
+                          <a:latin typeface="Segoe UI"/>
+                        </a:rPr>
+                        <a:t>Like printing the handwritten event log for handover or QA</a:t>
                       </a:r>
                     </a:p>
                   </a:txBody>
@@ -4406,7 +6103,7 @@
                     <a:lstStyle/>
                     <a:p>
                       <a:r>
-                        <a:rPr sz="1000" b="0">
+                        <a:rPr sz="900" b="0">
                           <a:solidFill>
                             <a:srgbClr val="1A2E1A"/>
                           </a:solidFill>
@@ -4424,13 +6121,31 @@
                     <a:lstStyle/>
                     <a:p>
                       <a:r>
-                        <a:rPr sz="1000" b="0">
-                          <a:solidFill>
-                            <a:srgbClr val="1A2E1A"/>
-                          </a:solidFill>
-                          <a:latin typeface="Segoe UI"/>
-                        </a:rPr>
-                        <a:t>Encodes the live case for another device to scan — still no server</a:t>
+                        <a:rPr sz="900" b="0">
+                          <a:solidFill>
+                            <a:srgbClr val="1A2E1A"/>
+                          </a:solidFill>
+                          <a:latin typeface="Segoe UI"/>
+                        </a:rPr>
+                        <a:t>Encodes the live case for another device to scan (custom builds)</a:t>
+                      </a:r>
+                    </a:p>
+                  </a:txBody>
+                  <a:tcPr/>
+                </a:tc>
+                <a:tc>
+                  <a:txBody>
+                    <a:bodyPr/>
+                    <a:lstStyle/>
+                    <a:p>
+                      <a:r>
+                        <a:rPr sz="900" b="0">
+                          <a:solidFill>
+                            <a:srgbClr val="1A2E1A"/>
+                          </a:solidFill>
+                          <a:latin typeface="Segoe UI"/>
+                        </a:rPr>
+                        <a:t>Like photocopying the running log for the second crew — but live and digital</a:t>
                       </a:r>
                     </a:p>
                   </a:txBody>
@@ -4444,7 +6159,7 @@
                     <a:lstStyle/>
                     <a:p>
                       <a:r>
-                        <a:rPr sz="1000" b="0">
+                        <a:rPr sz="900" b="0">
                           <a:solidFill>
                             <a:srgbClr val="1A2E1A"/>
                           </a:solidFill>
@@ -4462,13 +6177,31 @@
                     <a:lstStyle/>
                     <a:p>
                       <a:r>
-                        <a:rPr sz="1000" b="0">
-                          <a:solidFill>
-                            <a:srgbClr val="1A2E1A"/>
-                          </a:solidFill>
-                          <a:latin typeface="Segoe UI"/>
-                        </a:rPr>
-                        <a:t>Hosts the website at a fixed web address</a:t>
+                        <a:rPr sz="900" b="0">
+                          <a:solidFill>
+                            <a:srgbClr val="1A2E1A"/>
+                          </a:solidFill>
+                          <a:latin typeface="Segoe UI"/>
+                        </a:rPr>
+                        <a:t>Hosts the app at a fixed web address</a:t>
+                      </a:r>
+                    </a:p>
+                  </a:txBody>
+                  <a:tcPr/>
+                </a:tc>
+                <a:tc>
+                  <a:txBody>
+                    <a:bodyPr/>
+                    <a:lstStyle/>
+                    <a:p>
+                      <a:r>
+                        <a:rPr sz="900" b="0">
+                          <a:solidFill>
+                            <a:srgbClr val="1A2E1A"/>
+                          </a:solidFill>
+                          <a:latin typeface="Segoe UI"/>
+                        </a:rPr>
+                        <a:t>Like the trust link on the intranet where crews install the right version</a:t>
                       </a:r>
                     </a:p>
                   </a:txBody>
@@ -4482,7 +6215,7 @@
                     <a:lstStyle/>
                     <a:p>
                       <a:r>
-                        <a:rPr sz="1000" b="0">
+                        <a:rPr sz="900" b="0">
                           <a:solidFill>
                             <a:srgbClr val="1A2E1A"/>
                           </a:solidFill>
@@ -4500,13 +6233,31 @@
                     <a:lstStyle/>
                     <a:p>
                       <a:r>
-                        <a:rPr sz="1000" b="0">
-                          <a:solidFill>
-                            <a:srgbClr val="1A2E1A"/>
-                          </a:solidFill>
-                          <a:latin typeface="Segoe UI"/>
-                        </a:rPr>
-                        <a:t>Preview branch for testers; main for approved field builds</a:t>
+                        <a:rPr sz="900" b="0">
+                          <a:solidFill>
+                            <a:srgbClr val="1A2E1A"/>
+                          </a:solidFill>
+                          <a:latin typeface="Segoe UI"/>
+                        </a:rPr>
+                        <a:t>Preview for testers; main for approved field builds</a:t>
+                      </a:r>
+                    </a:p>
+                  </a:txBody>
+                  <a:tcPr/>
+                </a:tc>
+                <a:tc>
+                  <a:txBody>
+                    <a:bodyPr/>
+                    <a:lstStyle/>
+                    <a:p>
+                      <a:r>
+                        <a:rPr sz="900" b="0">
+                          <a:solidFill>
+                            <a:srgbClr val="1A2E1A"/>
+                          </a:solidFill>
+                          <a:latin typeface="Segoe UI"/>
+                        </a:rPr>
+                        <a:t>Like draft SOP on SharePoint → signed-off version on the official site</a:t>
                       </a:r>
                     </a:p>
                   </a:txBody>
@@ -4546,7 +6297,7 @@
                 </a:solidFill>
                 <a:latin typeface="Segoe UI"/>
               </a:rPr>
-              <a:t>Preview version 1.2.4 · jon@ostroforge.co.uk</a:t>
+              <a:t>Preview version 1.2.7 · jon@ostroforge.co.uk</a:t>
             </a:r>
           </a:p>
         </p:txBody>
@@ -4559,7 +6310,7 @@
 </p:sld>
 </file>
 
-<file path=ppt/slides/slide13.xml><?xml version="1.0" encoding="utf-8"?>
+<file path=ppt/slides/slide18.xml><?xml version="1.0" encoding="utf-8"?>
 <p:sld xmlns:a="http://schemas.openxmlformats.org/drawingml/2006/main" xmlns:p="http://schemas.openxmlformats.org/presentationml/2006/main" xmlns:r="http://schemas.openxmlformats.org/officeDocument/2006/relationships">
   <p:cSld>
     <p:spTree>
@@ -4685,6 +6436,665 @@
                 <a:latin typeface="Segoe UI"/>
               </a:rPr>
               <a:t>How individual trust versions are made</a:t>
+            </a:r>
+          </a:p>
+        </p:txBody>
+      </p:sp>
+      <p:graphicFrame>
+        <p:nvGraphicFramePr>
+          <p:cNvPr id="5" name="Table 4"/>
+          <p:cNvGraphicFramePr>
+            <a:graphicFrameLocks noGrp="1"/>
+          </p:cNvGraphicFramePr>
+          <p:nvPr/>
+        </p:nvGraphicFramePr>
+        <p:xfrm>
+          <a:off x="777240" y="1188720"/>
+          <a:ext cx="10424160" cy="2926080"/>
+        </p:xfrm>
+        <a:graphic>
+          <a:graphicData uri="http://schemas.openxmlformats.org/drawingml/2006/table">
+            <a:tbl>
+              <a:tblPr firstRow="1" bandRow="1">
+                <a:tableStyleId>{5C22544A-7EE6-4342-B048-85BDC9FD1C3A}</a:tableStyleId>
+              </a:tblPr>
+              <a:tblGrid>
+                <a:gridCol w="3474720"/>
+                <a:gridCol w="3474720"/>
+                <a:gridCol w="3474720"/>
+              </a:tblGrid>
+              <a:tr h="365760">
+                <a:tc>
+                  <a:txBody>
+                    <a:bodyPr/>
+                    <a:lstStyle/>
+                    <a:p>
+                      <a:r>
+                        <a:rPr sz="1000" b="1">
+                          <a:solidFill>
+                            <a:srgbClr val="FFFFFF"/>
+                          </a:solidFill>
+                          <a:latin typeface="Segoe UI"/>
+                        </a:rPr>
+                        <a:t>Layer</a:t>
+                      </a:r>
+                    </a:p>
+                  </a:txBody>
+                  <a:tcPr>
+                    <a:solidFill>
+                      <a:srgbClr val="2D6A2D"/>
+                    </a:solidFill>
+                  </a:tcPr>
+                </a:tc>
+                <a:tc>
+                  <a:txBody>
+                    <a:bodyPr/>
+                    <a:lstStyle/>
+                    <a:p>
+                      <a:r>
+                        <a:rPr sz="1000" b="1">
+                          <a:solidFill>
+                            <a:srgbClr val="FFFFFF"/>
+                          </a:solidFill>
+                          <a:latin typeface="Segoe UI"/>
+                        </a:rPr>
+                        <a:t>Role</a:t>
+                      </a:r>
+                    </a:p>
+                  </a:txBody>
+                  <a:tcPr>
+                    <a:solidFill>
+                      <a:srgbClr val="2D6A2D"/>
+                    </a:solidFill>
+                  </a:tcPr>
+                </a:tc>
+                <a:tc>
+                  <a:txBody>
+                    <a:bodyPr/>
+                    <a:lstStyle/>
+                    <a:p>
+                      <a:r>
+                        <a:rPr sz="1000" b="1">
+                          <a:solidFill>
+                            <a:srgbClr val="FFFFFF"/>
+                          </a:solidFill>
+                          <a:latin typeface="Segoe UI"/>
+                        </a:rPr>
+                        <a:t>Real-life analogy</a:t>
+                      </a:r>
+                    </a:p>
+                  </a:txBody>
+                  <a:tcPr>
+                    <a:solidFill>
+                      <a:srgbClr val="2D6A2D"/>
+                    </a:solidFill>
+                  </a:tcPr>
+                </a:tc>
+              </a:tr>
+              <a:tr h="365760">
+                <a:tc>
+                  <a:txBody>
+                    <a:bodyPr/>
+                    <a:lstStyle/>
+                    <a:p>
+                      <a:r>
+                        <a:rPr sz="900" b="0">
+                          <a:solidFill>
+                            <a:srgbClr val="1A2E1A"/>
+                          </a:solidFill>
+                          <a:latin typeface="Segoe UI"/>
+                        </a:rPr>
+                        <a:t>One shared app</a:t>
+                      </a:r>
+                    </a:p>
+                  </a:txBody>
+                  <a:tcPr/>
+                </a:tc>
+                <a:tc>
+                  <a:txBody>
+                    <a:bodyPr/>
+                    <a:lstStyle/>
+                    <a:p>
+                      <a:r>
+                        <a:rPr sz="900" b="0">
+                          <a:solidFill>
+                            <a:srgbClr val="1A2E1A"/>
+                          </a:solidFill>
+                          <a:latin typeface="Segoe UI"/>
+                        </a:rPr>
+                        <a:t>Same core timer, checklist, log, and flows for all trusts</a:t>
+                      </a:r>
+                    </a:p>
+                  </a:txBody>
+                  <a:tcPr/>
+                </a:tc>
+                <a:tc>
+                  <a:txBody>
+                    <a:bodyPr/>
+                    <a:lstStyle/>
+                    <a:p>
+                      <a:r>
+                        <a:rPr sz="900" b="0">
+                          <a:solidFill>
+                            <a:srgbClr val="1A2E1A"/>
+                          </a:solidFill>
+                          <a:latin typeface="Segoe UI"/>
+                        </a:rPr>
+                        <a:t>Like one national JRCALC arrest chapter — one source of truth</a:t>
+                      </a:r>
+                    </a:p>
+                  </a:txBody>
+                  <a:tcPr/>
+                </a:tc>
+              </a:tr>
+              <a:tr h="365760">
+                <a:tc>
+                  <a:txBody>
+                    <a:bodyPr/>
+                    <a:lstStyle/>
+                    <a:p>
+                      <a:r>
+                        <a:rPr sz="900" b="0">
+                          <a:solidFill>
+                            <a:srgbClr val="1A2E1A"/>
+                          </a:solidFill>
+                          <a:latin typeface="Segoe UI"/>
+                        </a:rPr>
+                        <a:t>Trust config file</a:t>
+                      </a:r>
+                    </a:p>
+                  </a:txBody>
+                  <a:tcPr/>
+                </a:tc>
+                <a:tc>
+                  <a:txBody>
+                    <a:bodyPr/>
+                    <a:lstStyle/>
+                    <a:p>
+                      <a:r>
+                        <a:rPr sz="900" b="0">
+                          <a:solidFill>
+                            <a:srgbClr val="1A2E1A"/>
+                          </a:solidFill>
+                          <a:latin typeface="Segoe UI"/>
+                        </a:rPr>
+                        <a:t>Per-trust name, crest, prompts (e.g. CODE SHOCK), extra documents</a:t>
+                      </a:r>
+                    </a:p>
+                  </a:txBody>
+                  <a:tcPr/>
+                </a:tc>
+                <a:tc>
+                  <a:txBody>
+                    <a:bodyPr/>
+                    <a:lstStyle/>
+                    <a:p>
+                      <a:r>
+                        <a:rPr sz="900" b="0">
+                          <a:solidFill>
+                            <a:srgbClr val="1A2E1A"/>
+                          </a:solidFill>
+                          <a:latin typeface="Segoe UI"/>
+                        </a:rPr>
+                        <a:t>Like the WMAS crest and local drug chart stapled into the front of the pack</a:t>
+                      </a:r>
+                    </a:p>
+                  </a:txBody>
+                  <a:tcPr/>
+                </a:tc>
+              </a:tr>
+              <a:tr h="365760">
+                <a:tc>
+                  <a:txBody>
+                    <a:bodyPr/>
+                    <a:lstStyle/>
+                    <a:p>
+                      <a:r>
+                        <a:rPr sz="900" b="0">
+                          <a:solidFill>
+                            <a:srgbClr val="1A2E1A"/>
+                          </a:solidFill>
+                          <a:latin typeface="Segoe UI"/>
+                        </a:rPr>
+                        <a:t>Custom-only features</a:t>
+                      </a:r>
+                    </a:p>
+                  </a:txBody>
+                  <a:tcPr/>
+                </a:tc>
+                <a:tc>
+                  <a:txBody>
+                    <a:bodyPr/>
+                    <a:lstStyle/>
+                    <a:p>
+                      <a:r>
+                        <a:rPr sz="900" b="0">
+                          <a:solidFill>
+                            <a:srgbClr val="1A2E1A"/>
+                          </a:solidFill>
+                          <a:latin typeface="Segoe UI"/>
+                        </a:rPr>
+                        <a:t>Case transfer, CODE SHOCK, timing overrides — Standard excludes QR transfer</a:t>
+                      </a:r>
+                    </a:p>
+                  </a:txBody>
+                  <a:tcPr/>
+                </a:tc>
+                <a:tc>
+                  <a:txBody>
+                    <a:bodyPr/>
+                    <a:lstStyle/>
+                    <a:p>
+                      <a:r>
+                        <a:rPr sz="900" b="0">
+                          <a:solidFill>
+                            <a:srgbClr val="1A2E1A"/>
+                          </a:solidFill>
+                          <a:latin typeface="Segoe UI"/>
+                        </a:rPr>
+                        <a:t>Like optional trust inserts (e.g. EOC call-out) not every ambulance service uses</a:t>
+                      </a:r>
+                    </a:p>
+                  </a:txBody>
+                  <a:tcPr/>
+                </a:tc>
+              </a:tr>
+              <a:tr h="365760">
+                <a:tc>
+                  <a:txBody>
+                    <a:bodyPr/>
+                    <a:lstStyle/>
+                    <a:p>
+                      <a:r>
+                        <a:rPr sz="900" b="0">
+                          <a:solidFill>
+                            <a:srgbClr val="1A2E1A"/>
+                          </a:solidFill>
+                          <a:latin typeface="Segoe UI"/>
+                        </a:rPr>
+                        <a:t>If not specified → defaults</a:t>
+                      </a:r>
+                    </a:p>
+                  </a:txBody>
+                  <a:tcPr/>
+                </a:tc>
+                <a:tc>
+                  <a:txBody>
+                    <a:bodyPr/>
+                    <a:lstStyle/>
+                    <a:p>
+                      <a:r>
+                        <a:rPr sz="900" b="0">
+                          <a:solidFill>
+                            <a:srgbClr val="1A2E1A"/>
+                          </a:solidFill>
+                          <a:latin typeface="Segoe UI"/>
+                        </a:rPr>
+                        <a:t>Rhythm check 2 min, adrenaline 4 min unless overridden</a:t>
+                      </a:r>
+                    </a:p>
+                  </a:txBody>
+                  <a:tcPr/>
+                </a:tc>
+                <a:tc>
+                  <a:txBody>
+                    <a:bodyPr/>
+                    <a:lstStyle/>
+                    <a:p>
+                      <a:r>
+                        <a:rPr sz="900" b="0">
+                          <a:solidFill>
+                            <a:srgbClr val="1A2E1A"/>
+                          </a:solidFill>
+                          <a:latin typeface="Segoe UI"/>
+                        </a:rPr>
+                        <a:t>Like JRCALC default intervals unless local SOP says otherwise</a:t>
+                      </a:r>
+                    </a:p>
+                  </a:txBody>
+                  <a:tcPr/>
+                </a:tc>
+              </a:tr>
+              <a:tr h="365760">
+                <a:tc>
+                  <a:txBody>
+                    <a:bodyPr/>
+                    <a:lstStyle/>
+                    <a:p>
+                      <a:r>
+                        <a:rPr sz="900" b="0">
+                          <a:solidFill>
+                            <a:srgbClr val="1A2E1A"/>
+                          </a:solidFill>
+                          <a:latin typeface="Segoe UI"/>
+                        </a:rPr>
+                        <a:t>Optional overrides</a:t>
+                      </a:r>
+                    </a:p>
+                  </a:txBody>
+                  <a:tcPr/>
+                </a:tc>
+                <a:tc>
+                  <a:txBody>
+                    <a:bodyPr/>
+                    <a:lstStyle/>
+                    <a:p>
+                      <a:r>
+                        <a:rPr sz="900" b="0">
+                          <a:solidFill>
+                            <a:srgbClr val="1A2E1A"/>
+                          </a:solidFill>
+                          <a:latin typeface="Segoe UI"/>
+                        </a:rPr>
+                        <a:t>Trust-specific intervals or rules read at build time</a:t>
+                      </a:r>
+                    </a:p>
+                  </a:txBody>
+                  <a:tcPr/>
+                </a:tc>
+                <a:tc>
+                  <a:txBody>
+                    <a:bodyPr/>
+                    <a:lstStyle/>
+                    <a:p>
+                      <a:r>
+                        <a:rPr sz="900" b="0">
+                          <a:solidFill>
+                            <a:srgbClr val="1A2E1A"/>
+                          </a:solidFill>
+                          <a:latin typeface="Segoe UI"/>
+                        </a:rPr>
+                        <a:t>Like agreeing a 90-second rhythm check in config instead of changing the whole app</a:t>
+                      </a:r>
+                    </a:p>
+                  </a:txBody>
+                  <a:tcPr/>
+                </a:tc>
+              </a:tr>
+              <a:tr h="365760">
+                <a:tc>
+                  <a:txBody>
+                    <a:bodyPr/>
+                    <a:lstStyle/>
+                    <a:p>
+                      <a:r>
+                        <a:rPr sz="900" b="0">
+                          <a:solidFill>
+                            <a:srgbClr val="1A2E1A"/>
+                          </a:solidFill>
+                          <a:latin typeface="Segoe UI"/>
+                        </a:rPr>
+                        <a:t>Separate build &amp; URL</a:t>
+                      </a:r>
+                    </a:p>
+                  </a:txBody>
+                  <a:tcPr/>
+                </a:tc>
+                <a:tc>
+                  <a:txBody>
+                    <a:bodyPr/>
+                    <a:lstStyle/>
+                    <a:p>
+                      <a:r>
+                        <a:rPr sz="900" b="0">
+                          <a:solidFill>
+                            <a:srgbClr val="1A2E1A"/>
+                          </a:solidFill>
+                          <a:latin typeface="Segoe UI"/>
+                        </a:rPr>
+                        <a:t>WMAS vs Standard compiled separately — crews get the right install link</a:t>
+                      </a:r>
+                    </a:p>
+                  </a:txBody>
+                  <a:tcPr/>
+                </a:tc>
+                <a:tc>
+                  <a:txBody>
+                    <a:bodyPr/>
+                    <a:lstStyle/>
+                    <a:p>
+                      <a:r>
+                        <a:rPr sz="900" b="0">
+                          <a:solidFill>
+                            <a:srgbClr val="1A2E1A"/>
+                          </a:solidFill>
+                          <a:latin typeface="Segoe UI"/>
+                        </a:rPr>
+                        <a:t>Like different QR codes on WMAS vs neighbouring trust tablets</a:t>
+                      </a:r>
+                    </a:p>
+                  </a:txBody>
+                  <a:tcPr/>
+                </a:tc>
+              </a:tr>
+              <a:tr h="365760">
+                <a:tc>
+                  <a:txBody>
+                    <a:bodyPr/>
+                    <a:lstStyle/>
+                    <a:p>
+                      <a:r>
+                        <a:rPr sz="900" b="0">
+                          <a:solidFill>
+                            <a:srgbClr val="1A2E1A"/>
+                          </a:solidFill>
+                          <a:latin typeface="Segoe UI"/>
+                        </a:rPr>
+                        <a:t>Preview → live</a:t>
+                      </a:r>
+                    </a:p>
+                  </a:txBody>
+                  <a:tcPr/>
+                </a:tc>
+                <a:tc>
+                  <a:txBody>
+                    <a:bodyPr/>
+                    <a:lstStyle/>
+                    <a:p>
+                      <a:r>
+                        <a:rPr sz="900" b="0">
+                          <a:solidFill>
+                            <a:srgbClr val="1A2E1A"/>
+                          </a:solidFill>
+                          <a:latin typeface="Segoe UI"/>
+                        </a:rPr>
+                        <a:t>Test on preview URL first; approved changes go to the field build</a:t>
+                      </a:r>
+                    </a:p>
+                  </a:txBody>
+                  <a:tcPr/>
+                </a:tc>
+                <a:tc>
+                  <a:txBody>
+                    <a:bodyPr/>
+                    <a:lstStyle/>
+                    <a:p>
+                      <a:r>
+                        <a:rPr sz="900" b="0">
+                          <a:solidFill>
+                            <a:srgbClr val="1A2E1A"/>
+                          </a:solidFill>
+                          <a:latin typeface="Segoe UI"/>
+                        </a:rPr>
+                        <a:t>Like pilot on training iPads before rolling out to front-line devices</a:t>
+                      </a:r>
+                    </a:p>
+                  </a:txBody>
+                  <a:tcPr/>
+                </a:tc>
+              </a:tr>
+            </a:tbl>
+          </a:graphicData>
+        </a:graphic>
+      </p:graphicFrame>
+      <p:sp>
+        <p:nvSpPr>
+          <p:cNvPr id="6" name="TextBox 5"/>
+          <p:cNvSpPr txBox="1"/>
+          <p:nvPr/>
+        </p:nvSpPr>
+        <p:spPr>
+          <a:xfrm>
+            <a:off x="777240" y="5897880"/>
+            <a:ext cx="10424160" cy="502920"/>
+          </a:xfrm>
+          <a:prstGeom prst="rect">
+            <a:avLst/>
+          </a:prstGeom>
+          <a:noFill/>
+        </p:spPr>
+        <p:txBody>
+          <a:bodyPr wrap="none">
+            <a:spAutoFit/>
+          </a:bodyPr>
+          <a:lstStyle/>
+          <a:p>
+            <a:r>
+              <a:rPr sz="1200" b="0">
+                <a:solidFill>
+                  <a:srgbClr val="4A5F4A"/>
+                </a:solidFill>
+                <a:latin typeface="Segoe UI"/>
+              </a:rPr>
+              <a:t>Clinical changes need trust sign-off; most trust differences are configuration, not a rewrite of the app.</a:t>
+            </a:r>
+          </a:p>
+        </p:txBody>
+      </p:sp>
+    </p:spTree>
+  </p:cSld>
+  <p:clrMapOvr>
+    <a:masterClrMapping/>
+  </p:clrMapOvr>
+</p:sld>
+</file>
+
+<file path=ppt/slides/slide19.xml><?xml version="1.0" encoding="utf-8"?>
+<p:sld xmlns:a="http://schemas.openxmlformats.org/drawingml/2006/main" xmlns:p="http://schemas.openxmlformats.org/presentationml/2006/main" xmlns:r="http://schemas.openxmlformats.org/officeDocument/2006/relationships">
+  <p:cSld>
+    <p:spTree>
+      <p:nvGrpSpPr>
+        <p:cNvPr id="1" name=""/>
+        <p:cNvGrpSpPr/>
+        <p:nvPr/>
+      </p:nvGrpSpPr>
+      <p:grpSpPr/>
+      <p:sp>
+        <p:nvSpPr>
+          <p:cNvPr id="2" name="Rectangle 1"/>
+          <p:cNvSpPr/>
+          <p:nvPr/>
+        </p:nvSpPr>
+        <p:spPr>
+          <a:xfrm>
+            <a:off x="0" y="0"/>
+            <a:ext cx="12191695" cy="6858000"/>
+          </a:xfrm>
+          <a:prstGeom prst="rect">
+            <a:avLst/>
+          </a:prstGeom>
+          <a:solidFill>
+            <a:srgbClr val="DFE8DF"/>
+          </a:solidFill>
+          <a:ln>
+            <a:noFill/>
+          </a:ln>
+        </p:spPr>
+        <p:style>
+          <a:lnRef idx="1">
+            <a:schemeClr val="accent1"/>
+          </a:lnRef>
+          <a:fillRef idx="3">
+            <a:schemeClr val="accent1"/>
+          </a:fillRef>
+          <a:effectRef idx="2">
+            <a:schemeClr val="accent1"/>
+          </a:effectRef>
+          <a:fontRef idx="minor">
+            <a:schemeClr val="lt1"/>
+          </a:fontRef>
+        </p:style>
+        <p:txBody>
+          <a:bodyPr rtlCol="0" anchor="ctr"/>
+          <a:lstStyle/>
+          <a:p>
+            <a:pPr algn="ctr"/>
+          </a:p>
+        </p:txBody>
+      </p:sp>
+      <p:sp>
+        <p:nvSpPr>
+          <p:cNvPr id="3" name="Rectangle 2"/>
+          <p:cNvSpPr/>
+          <p:nvPr/>
+        </p:nvSpPr>
+        <p:spPr>
+          <a:xfrm>
+            <a:off x="0" y="0"/>
+            <a:ext cx="12191695" cy="109728"/>
+          </a:xfrm>
+          <a:prstGeom prst="rect">
+            <a:avLst/>
+          </a:prstGeom>
+          <a:solidFill>
+            <a:srgbClr val="1F4F1F"/>
+          </a:solidFill>
+          <a:ln>
+            <a:noFill/>
+          </a:ln>
+        </p:spPr>
+        <p:style>
+          <a:lnRef idx="1">
+            <a:schemeClr val="accent1"/>
+          </a:lnRef>
+          <a:fillRef idx="3">
+            <a:schemeClr val="accent1"/>
+          </a:fillRef>
+          <a:effectRef idx="2">
+            <a:schemeClr val="accent1"/>
+          </a:effectRef>
+          <a:fontRef idx="minor">
+            <a:schemeClr val="lt1"/>
+          </a:fontRef>
+        </p:style>
+        <p:txBody>
+          <a:bodyPr rtlCol="0" anchor="ctr"/>
+          <a:lstStyle/>
+          <a:p>
+            <a:pPr algn="ctr"/>
+          </a:p>
+        </p:txBody>
+      </p:sp>
+      <p:sp>
+        <p:nvSpPr>
+          <p:cNvPr id="4" name="TextBox 3"/>
+          <p:cNvSpPr txBox="1"/>
+          <p:nvPr/>
+        </p:nvSpPr>
+        <p:spPr>
+          <a:xfrm>
+            <a:off x="777240" y="502920"/>
+            <a:ext cx="10515600" cy="640080"/>
+          </a:xfrm>
+          <a:prstGeom prst="rect">
+            <a:avLst/>
+          </a:prstGeom>
+          <a:noFill/>
+        </p:spPr>
+        <p:txBody>
+          <a:bodyPr wrap="none">
+            <a:spAutoFit/>
+          </a:bodyPr>
+          <a:lstStyle/>
+          <a:p>
+            <a:r>
+              <a:rPr sz="2600" b="1">
+                <a:solidFill>
+                  <a:srgbClr val="163816"/>
+                </a:solidFill>
+                <a:latin typeface="Segoe UI"/>
+              </a:rPr>
+              <a:t>Fixing simple errors and omissions</a:t>
             </a:r>
           </a:p>
         </p:txBody>
@@ -4708,8 +7118,9 @@
                 <a:tableStyleId>{5C22544A-7EE6-4342-B048-85BDC9FD1C3A}</a:tableStyleId>
               </a:tblPr>
               <a:tblGrid>
-                <a:gridCol w="5212080"/>
-                <a:gridCol w="5212080"/>
+                <a:gridCol w="3474720"/>
+                <a:gridCol w="3474720"/>
+                <a:gridCol w="3474720"/>
               </a:tblGrid>
               <a:tr h="365760">
                 <a:tc>
@@ -4724,7 +7135,7 @@
                           </a:solidFill>
                           <a:latin typeface="Segoe UI"/>
                         </a:rPr>
-                        <a:t>Layer</a:t>
+                        <a:t>Type of fix</a:t>
                       </a:r>
                     </a:p>
                   </a:txBody>
@@ -4746,7 +7157,7 @@
                           </a:solidFill>
                           <a:latin typeface="Segoe UI"/>
                         </a:rPr>
-                        <a:t>In simple terms</a:t>
+                        <a:t>Example</a:t>
                       </a:r>
                     </a:p>
                   </a:txBody>
@@ -4756,6 +7167,28 @@
                     </a:solidFill>
                   </a:tcPr>
                 </a:tc>
+                <a:tc>
+                  <a:txBody>
+                    <a:bodyPr/>
+                    <a:lstStyle/>
+                    <a:p>
+                      <a:r>
+                        <a:rPr sz="1200" b="1">
+                          <a:solidFill>
+                            <a:srgbClr val="FFFFFF"/>
+                          </a:solidFill>
+                          <a:latin typeface="Segoe UI"/>
+                        </a:rPr>
+                        <a:t>Typical turnaround</a:t>
+                      </a:r>
+                    </a:p>
+                  </a:txBody>
+                  <a:tcPr>
+                    <a:solidFill>
+                      <a:srgbClr val="2D6A2D"/>
+                    </a:solidFill>
+                  </a:tcPr>
+                </a:tc>
               </a:tr>
               <a:tr h="365760">
                 <a:tc>
@@ -4770,7 +7203,7 @@
                           </a:solidFill>
                           <a:latin typeface="Segoe UI"/>
                         </a:rPr>
-                        <a:t>One shared app</a:t>
+                        <a:t>Trust-only addition</a:t>
                       </a:r>
                     </a:p>
                   </a:txBody>
@@ -4788,7 +7221,25 @@
                           </a:solidFill>
                           <a:latin typeface="Segoe UI"/>
                         </a:rPr>
-                        <a:t>Same core timer, checklist, log, and flows for all trusts — maintained in one codebase</a:t>
+                        <a:t>A drug missing from Interventions → Medications for one trust</a:t>
+                      </a:r>
+                    </a:p>
+                  </a:txBody>
+                  <a:tcPr/>
+                </a:tc>
+                <a:tc>
+                  <a:txBody>
+                    <a:bodyPr/>
+                    <a:lstStyle/>
+                    <a:p>
+                      <a:r>
+                        <a:rPr sz="1000" b="0">
+                          <a:solidFill>
+                            <a:srgbClr val="1A2E1A"/>
+                          </a:solidFill>
+                          <a:latin typeface="Segoe UI"/>
+                        </a:rPr>
+                        <a:t>Same day on preview — add to trust config, rebuild, deploy (~30–60 min)</a:t>
                       </a:r>
                     </a:p>
                   </a:txBody>
@@ -4808,7 +7259,7 @@
                           </a:solidFill>
                           <a:latin typeface="Segoe UI"/>
                         </a:rPr>
-                        <a:t>Trust config file</a:t>
+                        <a:t>Shared list update</a:t>
                       </a:r>
                     </a:p>
                   </a:txBody>
@@ -4826,7 +7277,25 @@
                           </a:solidFill>
                           <a:latin typeface="Segoe UI"/>
                         </a:rPr>
-                        <a:t>Per-trust settings: name, crest/logo, trust-only prompts (e.g. WMAS CODE SHOCK), extra documents</a:t>
+                        <a:t>A drug that should appear in all builds</a:t>
+                      </a:r>
+                    </a:p>
+                  </a:txBody>
+                  <a:tcPr/>
+                </a:tc>
+                <a:tc>
+                  <a:txBody>
+                    <a:bodyPr/>
+                    <a:lstStyle/>
+                    <a:p>
+                      <a:r>
+                        <a:rPr sz="1000" b="0">
+                          <a:solidFill>
+                            <a:srgbClr val="1A2E1A"/>
+                          </a:solidFill>
+                          <a:latin typeface="Segoe UI"/>
+                        </a:rPr>
+                        <a:t>Same day on preview — one code change + quick test (~1–2 hours)</a:t>
                       </a:r>
                     </a:p>
                   </a:txBody>
@@ -4846,7 +7315,7 @@
                           </a:solidFill>
                           <a:latin typeface="Segoe UI"/>
                         </a:rPr>
-                        <a:t>If not specified → defaults</a:t>
+                        <a:t>Wording or label</a:t>
                       </a:r>
                     </a:p>
                   </a:txBody>
@@ -4864,7 +7333,25 @@
                           </a:solidFill>
                           <a:latin typeface="Segoe UI"/>
                         </a:rPr>
-                        <a:t>No timing line in config = rhythm check every 2 minutes, adrenaline every 4 minutes (UK default)</a:t>
+                        <a:t>Typo in a prompt, button, or log entry text</a:t>
+                      </a:r>
+                    </a:p>
+                  </a:txBody>
+                  <a:tcPr/>
+                </a:tc>
+                <a:tc>
+                  <a:txBody>
+                    <a:bodyPr/>
+                    <a:lstStyle/>
+                    <a:p>
+                      <a:r>
+                        <a:rPr sz="1000" b="0">
+                          <a:solidFill>
+                            <a:srgbClr val="1A2E1A"/>
+                          </a:solidFill>
+                          <a:latin typeface="Segoe UI"/>
+                        </a:rPr>
+                        <a:t>Same day on preview (~15–30 min)</a:t>
                       </a:r>
                     </a:p>
                   </a:txBody>
@@ -4884,7 +7371,7 @@
                           </a:solidFill>
                           <a:latin typeface="Segoe UI"/>
                         </a:rPr>
-                        <a:t>Optional overrides</a:t>
+                        <a:t>Trust reminder rule</a:t>
                       </a:r>
                     </a:p>
                   </a:txBody>
@@ -4902,7 +7389,25 @@
                           </a:solidFill>
                           <a:latin typeface="Segoe UI"/>
                         </a:rPr>
-                        <a:t>A trust can request different intervals or rules in config — core code reads them at build time</a:t>
+                        <a:t>Adjust when a prompt appears (e.g. CODE SHOCK timing)</a:t>
+                      </a:r>
+                    </a:p>
+                  </a:txBody>
+                  <a:tcPr/>
+                </a:tc>
+                <a:tc>
+                  <a:txBody>
+                    <a:bodyPr/>
+                    <a:lstStyle/>
+                    <a:p>
+                      <a:r>
+                        <a:rPr sz="1000" b="0">
+                          <a:solidFill>
+                            <a:srgbClr val="1A2E1A"/>
+                          </a:solidFill>
+                          <a:latin typeface="Segoe UI"/>
+                        </a:rPr>
+                        <a:t>Same day to 1 day on preview (~1–2 hours)</a:t>
                       </a:r>
                     </a:p>
                   </a:txBody>
@@ -4922,7 +7427,7 @@
                           </a:solidFill>
                           <a:latin typeface="Segoe UI"/>
                         </a:rPr>
-                        <a:t>Separate build &amp; URL</a:t>
+                        <a:t>Live field build</a:t>
                       </a:r>
                     </a:p>
                   </a:txBody>
@@ -4940,7 +7445,25 @@
                           </a:solidFill>
                           <a:latin typeface="Segoe UI"/>
                         </a:rPr>
-                        <a:t>Each trust version is compiled separately (e.g. WMAS vs Standard) — crews install the right link</a:t>
+                        <a:t>Any of the above after clinical review</a:t>
+                      </a:r>
+                    </a:p>
+                  </a:txBody>
+                  <a:tcPr/>
+                </a:tc>
+                <a:tc>
+                  <a:txBody>
+                    <a:bodyPr/>
+                    <a:lstStyle/>
+                    <a:p>
+                      <a:r>
+                        <a:rPr sz="1000" b="0">
+                          <a:solidFill>
+                            <a:srgbClr val="1A2E1A"/>
+                          </a:solidFill>
+                          <a:latin typeface="Segoe UI"/>
+                        </a:rPr>
+                        <a:t>After merge to main and redeploy — usually within days, not weeks</a:t>
                       </a:r>
                     </a:p>
                   </a:txBody>
@@ -4960,7 +7483,7 @@
                           </a:solidFill>
                           <a:latin typeface="Segoe UI"/>
                         </a:rPr>
-                        <a:t>Preview → live</a:t>
+                        <a:t>Larger change</a:t>
                       </a:r>
                     </a:p>
                   </a:txBody>
@@ -4978,7 +7501,25 @@
                           </a:solidFill>
                           <a:latin typeface="Segoe UI"/>
                         </a:rPr>
-                        <a:t>Changes tested on a preview URL first; approved updates merged to the live field build</a:t>
+                        <a:t>New flow, timer logic, or clinical branch</a:t>
+                      </a:r>
+                    </a:p>
+                  </a:txBody>
+                  <a:tcPr/>
+                </a:tc>
+                <a:tc>
+                  <a:txBody>
+                    <a:bodyPr/>
+                    <a:lstStyle/>
+                    <a:p>
+                      <a:r>
+                        <a:rPr sz="1000" b="0">
+                          <a:solidFill>
+                            <a:srgbClr val="1A2E1A"/>
+                          </a:solidFill>
+                          <a:latin typeface="Segoe UI"/>
+                        </a:rPr>
+                        <a:t>Longer — scoped separately; not a same-day fix</a:t>
                       </a:r>
                     </a:p>
                   </a:txBody>
@@ -5018,7 +7559,7 @@
                 </a:solidFill>
                 <a:latin typeface="Segoe UI"/>
               </a:rPr>
-              <a:t>Clinical changes need trust sign-off; most trust differences are configuration, not a rewrite of the app.</a:t>
+              <a:t>Preview URL can be updated quickly for testers; live crew builds follow trust sign-off. Crews may need to refresh or reinstall to pick up updates.</a:t>
             </a:r>
           </a:p>
         </p:txBody>
@@ -5031,7 +7572,7 @@
 </p:sld>
 </file>
 
-<file path=ppt/slides/slide14.xml><?xml version="1.0" encoding="utf-8"?>
+<file path=ppt/slides/slide2.xml><?xml version="1.0" encoding="utf-8"?>
 <p:sld xmlns:a="http://schemas.openxmlformats.org/drawingml/2006/main" xmlns:p="http://schemas.openxmlformats.org/presentationml/2006/main" xmlns:r="http://schemas.openxmlformats.org/officeDocument/2006/relationships">
   <p:cSld>
     <p:spTree>
@@ -5135,6 +7676,295 @@
         </p:nvSpPr>
         <p:spPr>
           <a:xfrm>
+            <a:off x="777240" y="502920"/>
+            <a:ext cx="10515600" cy="640080"/>
+          </a:xfrm>
+          <a:prstGeom prst="rect">
+            <a:avLst/>
+          </a:prstGeom>
+          <a:noFill/>
+        </p:spPr>
+        <p:txBody>
+          <a:bodyPr wrap="none">
+            <a:spAutoFit/>
+          </a:bodyPr>
+          <a:lstStyle/>
+          <a:p>
+            <a:r>
+              <a:rPr sz="2600" b="1">
+                <a:solidFill>
+                  <a:srgbClr val="163816"/>
+                </a:solidFill>
+                <a:latin typeface="Segoe UI"/>
+              </a:rPr>
+              <a:t>App features — case flow &amp; timer</a:t>
+            </a:r>
+          </a:p>
+        </p:txBody>
+      </p:sp>
+      <p:sp>
+        <p:nvSpPr>
+          <p:cNvPr id="5" name="TextBox 4"/>
+          <p:cNvSpPr txBox="1"/>
+          <p:nvPr/>
+        </p:nvSpPr>
+        <p:spPr>
+          <a:xfrm>
+            <a:off x="868680" y="1234440"/>
+            <a:ext cx="10332720" cy="4937760"/>
+          </a:xfrm>
+          <a:prstGeom prst="rect">
+            <a:avLst/>
+          </a:prstGeom>
+          <a:noFill/>
+        </p:spPr>
+        <p:txBody>
+          <a:bodyPr wrap="square">
+            <a:spAutoFit/>
+          </a:bodyPr>
+          <a:lstStyle/>
+          <a:p>
+            <a:pPr>
+              <a:spcAft>
+                <a:spcPts val="500"/>
+              </a:spcAft>
+            </a:pPr>
+            <a:r>
+              <a:rPr sz="1300" b="0">
+                <a:solidFill>
+                  <a:srgbClr val="1A2E1A"/>
+                </a:solidFill>
+                <a:latin typeface="Segoe UI"/>
+              </a:rPr>
+              <a:t>Start protocol, initial assessment, and initial rhythm (VF / pVT, PEA, Asystole)</a:t>
+            </a:r>
+          </a:p>
+          <a:p>
+            <a:pPr>
+              <a:spcAft>
+                <a:spcPts val="500"/>
+              </a:spcAft>
+            </a:pPr>
+            <a:r>
+              <a:rPr sz="1300" b="0">
+                <a:solidFill>
+                  <a:srgbClr val="1A2E1A"/>
+                </a:solidFill>
+                <a:latin typeface="Segoe UI"/>
+              </a:rPr>
+              <a:t>Elapsed resuscitation timer with 2-minute rhythm-check countdown</a:t>
+            </a:r>
+          </a:p>
+          <a:p>
+            <a:pPr>
+              <a:spcAft>
+                <a:spcPts val="500"/>
+              </a:spcAft>
+            </a:pPr>
+            <a:r>
+              <a:rPr sz="1300" b="0">
+                <a:solidFill>
+                  <a:srgbClr val="1A2E1A"/>
+                </a:solidFill>
+                <a:latin typeface="Segoe UI"/>
+              </a:rPr>
+              <a:t>Shock logging (joules), total shock count, adrenaline / amiodarone due in timer bar</a:t>
+            </a:r>
+          </a:p>
+          <a:p>
+            <a:pPr>
+              <a:spcAft>
+                <a:spcPts val="500"/>
+              </a:spcAft>
+            </a:pPr>
+            <a:r>
+              <a:rPr sz="1300" b="0">
+                <a:solidFill>
+                  <a:srgbClr val="1A2E1A"/>
+                </a:solidFill>
+                <a:latin typeface="Segoe UI"/>
+              </a:rPr>
+              <a:t>Switch to ROSC mode or return to cardiac arrest (re-arrest) from timer bar</a:t>
+            </a:r>
+          </a:p>
+          <a:p>
+            <a:pPr>
+              <a:spcAft>
+                <a:spcPts val="500"/>
+              </a:spcAft>
+            </a:pPr>
+            <a:r>
+              <a:rPr sz="1300" b="0">
+                <a:solidFill>
+                  <a:srgbClr val="1A2E1A"/>
+                </a:solidFill>
+                <a:latin typeface="Segoe UI"/>
+              </a:rPr>
+              <a:t>TOR button, 45-minute termination review alert, and full TOR questionnaire</a:t>
+            </a:r>
+          </a:p>
+          <a:p>
+            <a:pPr>
+              <a:spcAft>
+                <a:spcPts val="500"/>
+              </a:spcAft>
+            </a:pPr>
+            <a:r>
+              <a:rPr sz="1300" b="0">
+                <a:solidFill>
+                  <a:srgbClr val="1A2E1A"/>
+                </a:solidFill>
+                <a:latin typeface="Segoe UI"/>
+              </a:rPr>
+              <a:t>Post-TOR verification-of-death wait and initial-assessment VoD (asystole observation)</a:t>
+            </a:r>
+          </a:p>
+          <a:p>
+            <a:pPr>
+              <a:spcAft>
+                <a:spcPts val="500"/>
+              </a:spcAft>
+            </a:pPr>
+            <a:r>
+              <a:rPr sz="1300" b="0">
+                <a:solidFill>
+                  <a:srgbClr val="1A2E1A"/>
+                </a:solidFill>
+                <a:latin typeface="Segoe UI"/>
+              </a:rPr>
+              <a:t>Patient handed over — stops timers, locks case, opens log (all builds)</a:t>
+            </a:r>
+          </a:p>
+          <a:p>
+            <a:pPr>
+              <a:spcAft>
+                <a:spcPts val="500"/>
+              </a:spcAft>
+            </a:pPr>
+            <a:r>
+              <a:rPr sz="1300" b="0">
+                <a:solidFill>
+                  <a:srgbClr val="1A2E1A"/>
+                </a:solidFill>
+                <a:latin typeface="Segoe UI"/>
+              </a:rPr>
+              <a:t>Metronome on timer bar; night mode; screen stays awake during a case</a:t>
+            </a:r>
+          </a:p>
+        </p:txBody>
+      </p:sp>
+    </p:spTree>
+  </p:cSld>
+  <p:clrMapOvr>
+    <a:masterClrMapping/>
+  </p:clrMapOvr>
+</p:sld>
+</file>
+
+<file path=ppt/slides/slide20.xml><?xml version="1.0" encoding="utf-8"?>
+<p:sld xmlns:a="http://schemas.openxmlformats.org/drawingml/2006/main" xmlns:p="http://schemas.openxmlformats.org/presentationml/2006/main" xmlns:r="http://schemas.openxmlformats.org/officeDocument/2006/relationships">
+  <p:cSld>
+    <p:spTree>
+      <p:nvGrpSpPr>
+        <p:cNvPr id="1" name=""/>
+        <p:cNvGrpSpPr/>
+        <p:nvPr/>
+      </p:nvGrpSpPr>
+      <p:grpSpPr/>
+      <p:sp>
+        <p:nvSpPr>
+          <p:cNvPr id="2" name="Rectangle 1"/>
+          <p:cNvSpPr/>
+          <p:nvPr/>
+        </p:nvSpPr>
+        <p:spPr>
+          <a:xfrm>
+            <a:off x="0" y="0"/>
+            <a:ext cx="12191695" cy="6858000"/>
+          </a:xfrm>
+          <a:prstGeom prst="rect">
+            <a:avLst/>
+          </a:prstGeom>
+          <a:solidFill>
+            <a:srgbClr val="DFE8DF"/>
+          </a:solidFill>
+          <a:ln>
+            <a:noFill/>
+          </a:ln>
+        </p:spPr>
+        <p:style>
+          <a:lnRef idx="1">
+            <a:schemeClr val="accent1"/>
+          </a:lnRef>
+          <a:fillRef idx="3">
+            <a:schemeClr val="accent1"/>
+          </a:fillRef>
+          <a:effectRef idx="2">
+            <a:schemeClr val="accent1"/>
+          </a:effectRef>
+          <a:fontRef idx="minor">
+            <a:schemeClr val="lt1"/>
+          </a:fontRef>
+        </p:style>
+        <p:txBody>
+          <a:bodyPr rtlCol="0" anchor="ctr"/>
+          <a:lstStyle/>
+          <a:p>
+            <a:pPr algn="ctr"/>
+          </a:p>
+        </p:txBody>
+      </p:sp>
+      <p:sp>
+        <p:nvSpPr>
+          <p:cNvPr id="3" name="Rectangle 2"/>
+          <p:cNvSpPr/>
+          <p:nvPr/>
+        </p:nvSpPr>
+        <p:spPr>
+          <a:xfrm>
+            <a:off x="0" y="0"/>
+            <a:ext cx="12191695" cy="109728"/>
+          </a:xfrm>
+          <a:prstGeom prst="rect">
+            <a:avLst/>
+          </a:prstGeom>
+          <a:solidFill>
+            <a:srgbClr val="1F4F1F"/>
+          </a:solidFill>
+          <a:ln>
+            <a:noFill/>
+          </a:ln>
+        </p:spPr>
+        <p:style>
+          <a:lnRef idx="1">
+            <a:schemeClr val="accent1"/>
+          </a:lnRef>
+          <a:fillRef idx="3">
+            <a:schemeClr val="accent1"/>
+          </a:fillRef>
+          <a:effectRef idx="2">
+            <a:schemeClr val="accent1"/>
+          </a:effectRef>
+          <a:fontRef idx="minor">
+            <a:schemeClr val="lt1"/>
+          </a:fontRef>
+        </p:style>
+        <p:txBody>
+          <a:bodyPr rtlCol="0" anchor="ctr"/>
+          <a:lstStyle/>
+          <a:p>
+            <a:pPr algn="ctr"/>
+          </a:p>
+        </p:txBody>
+      </p:sp>
+      <p:sp>
+        <p:nvSpPr>
+          <p:cNvPr id="4" name="TextBox 3"/>
+          <p:cNvSpPr txBox="1"/>
+          <p:nvPr/>
+        </p:nvSpPr>
+        <p:spPr>
+          <a:xfrm>
             <a:off x="777240" y="2651760"/>
             <a:ext cx="10515600" cy="1097280"/>
           </a:xfrm>
@@ -5212,7 +8042,7 @@
 </p:sld>
 </file>
 
-<file path=ppt/slides/slide15.xml><?xml version="1.0" encoding="utf-8"?>
+<file path=ppt/slides/slide21.xml><?xml version="1.0" encoding="utf-8"?>
 <p:sld xmlns:a="http://schemas.openxmlformats.org/drawingml/2006/main" xmlns:p="http://schemas.openxmlformats.org/presentationml/2006/main" xmlns:r="http://schemas.openxmlformats.org/officeDocument/2006/relationships">
   <p:cSld>
     <p:spTree>
@@ -5555,7 +8385,7 @@
                           </a:solidFill>
                           <a:latin typeface="Segoe UI"/>
                         </a:rPr>
-                        <a:t>Road iPads and CFR phones can each get the right build</a:t>
+                        <a:t>Crew iPads and CFR phones can each get the right build</a:t>
                       </a:r>
                     </a:p>
                   </a:txBody>
@@ -5608,7 +8438,7 @@
 </p:sld>
 </file>
 
-<file path=ppt/slides/slide16.xml><?xml version="1.0" encoding="utf-8"?>
+<file path=ppt/slides/slide22.xml><?xml version="1.0" encoding="utf-8"?>
 <p:sld xmlns:a="http://schemas.openxmlformats.org/drawingml/2006/main" xmlns:p="http://schemas.openxmlformats.org/presentationml/2006/main" xmlns:r="http://schemas.openxmlformats.org/officeDocument/2006/relationships">
   <p:cSld>
     <p:spTree>
@@ -5772,7 +8602,7 @@
                 </a:solidFill>
                 <a:latin typeface="Segoe UI"/>
               </a:rPr>
-              <a:t>Separate CFR build: CPR quality, AED / shocks, rhythm timing, call for help — no road-only drugs or interventions</a:t>
+              <a:t>Separate CFR build: CPR quality, AED / shocks, rhythm timing, call for help — limited to CFR scope of practice</a:t>
             </a:r>
           </a:p>
           <a:p>
@@ -5804,7 +8634,7 @@
                 </a:solidFill>
                 <a:latin typeface="Segoe UI"/>
               </a:rPr>
-              <a:t>When ambulance arrives: Transfer case (QR) — same log and timers continue on the road crew device</a:t>
+              <a:t>When ambulance arrives: Transfer case (QR) — same log and timers continue on the crew device</a:t>
             </a:r>
           </a:p>
           <a:p>
@@ -5820,7 +8650,7 @@
                 </a:solidFill>
                 <a:latin typeface="Segoe UI"/>
               </a:rPr>
-              <a:t>Road app unlocks full ALS prompts; CFR actions stay in the log; event logged as scope upgraded to road crew</a:t>
+              <a:t>Crew app unlocks full ALS prompts; CFR actions stay in the log; event logged as scope upgraded to crew</a:t>
             </a:r>
           </a:p>
           <a:p>
@@ -5836,7 +8666,7 @@
                 </a:solidFill>
                 <a:latin typeface="Segoe UI"/>
               </a:rPr>
-              <a:t>Reuses existing case-transfer design — extend config with pathway (CFR vs road) in the handoff payload</a:t>
+              <a:t>Reuses existing case-transfer design — extend config with pathway (CFR vs crew) in the handoff payload</a:t>
             </a:r>
           </a:p>
           <a:p>
@@ -5865,7 +8695,7 @@
 </p:sld>
 </file>
 
-<file path=ppt/slides/slide17.xml><?xml version="1.0" encoding="utf-8"?>
+<file path=ppt/slides/slide23.xml><?xml version="1.0" encoding="utf-8"?>
 <p:sld xmlns:a="http://schemas.openxmlformats.org/drawingml/2006/main" xmlns:p="http://schemas.openxmlformats.org/presentationml/2006/main" xmlns:r="http://schemas.openxmlformats.org/officeDocument/2006/relationships">
   <p:cSld>
     <p:spTree>
@@ -6093,7 +8923,7 @@
                 </a:solidFill>
                 <a:latin typeface="Segoe UI"/>
               </a:rPr>
-              <a:t>Likely follows adult road pilot and CFR pathway unless trust has a specific paediatric QI priority</a:t>
+              <a:t>Likely follows adult crew pilot and CFR pathway unless trust has a specific paediatric QI priority</a:t>
             </a:r>
           </a:p>
         </p:txBody>
@@ -6106,7 +8936,7 @@
 </p:sld>
 </file>
 
-<file path=ppt/slides/slide18.xml><?xml version="1.0" encoding="utf-8"?>
+<file path=ppt/slides/slide24.xml><?xml version="1.0" encoding="utf-8"?>
 <p:sld xmlns:a="http://schemas.openxmlformats.org/drawingml/2006/main" xmlns:p="http://schemas.openxmlformats.org/presentationml/2006/main" xmlns:r="http://schemas.openxmlformats.org/officeDocument/2006/relationships">
   <p:cSld>
     <p:spTree>
@@ -6231,283 +9061,21 @@
                 </a:solidFill>
                 <a:latin typeface="Segoe UI"/>
               </a:rPr>
-              <a:t>Suggested development sequence</a:t>
-            </a:r>
-          </a:p>
-        </p:txBody>
-      </p:sp>
-      <p:graphicFrame>
-        <p:nvGraphicFramePr>
-          <p:cNvPr id="5" name="Table 4"/>
-          <p:cNvGraphicFramePr>
-            <a:graphicFrameLocks noGrp="1"/>
-          </p:cNvGraphicFramePr>
-          <p:nvPr/>
-        </p:nvGraphicFramePr>
-        <p:xfrm>
-          <a:off x="777240" y="1188720"/>
-          <a:ext cx="10424160" cy="2194560"/>
-        </p:xfrm>
-        <a:graphic>
-          <a:graphicData uri="http://schemas.openxmlformats.org/drawingml/2006/table">
-            <a:tbl>
-              <a:tblPr firstRow="1" bandRow="1">
-                <a:tableStyleId>{5C22544A-7EE6-4342-B048-85BDC9FD1C3A}</a:tableStyleId>
-              </a:tblPr>
-              <a:tblGrid>
-                <a:gridCol w="5212080"/>
-                <a:gridCol w="5212080"/>
-              </a:tblGrid>
-              <a:tr h="365760">
-                <a:tc>
-                  <a:txBody>
-                    <a:bodyPr/>
-                    <a:lstStyle/>
-                    <a:p>
-                      <a:r>
-                        <a:rPr sz="1200" b="1">
-                          <a:solidFill>
-                            <a:srgbClr val="FFFFFF"/>
-                          </a:solidFill>
-                          <a:latin typeface="Segoe UI"/>
-                        </a:rPr>
-                        <a:t>Phase</a:t>
-                      </a:r>
-                    </a:p>
-                  </a:txBody>
-                  <a:tcPr>
-                    <a:solidFill>
-                      <a:srgbClr val="2D6A2D"/>
-                    </a:solidFill>
-                  </a:tcPr>
-                </a:tc>
-                <a:tc>
-                  <a:txBody>
-                    <a:bodyPr/>
-                    <a:lstStyle/>
-                    <a:p>
-                      <a:r>
-                        <a:rPr sz="1200" b="1">
-                          <a:solidFill>
-                            <a:srgbClr val="FFFFFF"/>
-                          </a:solidFill>
-                          <a:latin typeface="Segoe UI"/>
-                        </a:rPr>
-                        <a:t>Focus</a:t>
-                      </a:r>
-                    </a:p>
-                  </a:txBody>
-                  <a:tcPr>
-                    <a:solidFill>
-                      <a:srgbClr val="2D6A2D"/>
-                    </a:solidFill>
-                  </a:tcPr>
-                </a:tc>
-              </a:tr>
-              <a:tr h="365760">
-                <a:tc>
-                  <a:txBody>
-                    <a:bodyPr/>
-                    <a:lstStyle/>
-                    <a:p>
-                      <a:r>
-                        <a:rPr sz="1100" b="0">
-                          <a:solidFill>
-                            <a:srgbClr val="1A2E1A"/>
-                          </a:solidFill>
-                          <a:latin typeface="Segoe UI"/>
-                        </a:rPr>
-                        <a:t>Now</a:t>
-                      </a:r>
-                    </a:p>
-                  </a:txBody>
-                  <a:tcPr/>
-                </a:tc>
-                <a:tc>
-                  <a:txBody>
-                    <a:bodyPr/>
-                    <a:lstStyle/>
-                    <a:p>
-                      <a:r>
-                        <a:rPr sz="1100" b="0">
-                          <a:solidFill>
-                            <a:srgbClr val="1A2E1A"/>
-                          </a:solidFill>
-                          <a:latin typeface="Segoe UI"/>
-                        </a:rPr>
-                        <a:t>Adult road preview (v1.2.4) → controlled pilot; PWA or home-screen install</a:t>
-                      </a:r>
-                    </a:p>
-                  </a:txBody>
-                  <a:tcPr/>
-                </a:tc>
-              </a:tr>
-              <a:tr h="365760">
-                <a:tc>
-                  <a:txBody>
-                    <a:bodyPr/>
-                    <a:lstStyle/>
-                    <a:p>
-                      <a:r>
-                        <a:rPr sz="1100" b="0">
-                          <a:solidFill>
-                            <a:srgbClr val="1A2E1A"/>
-                          </a:solidFill>
-                          <a:latin typeface="Segoe UI"/>
-                        </a:rPr>
-                        <a:t>Next</a:t>
-                      </a:r>
-                    </a:p>
-                  </a:txBody>
-                  <a:tcPr/>
-                </a:tc>
-                <a:tc>
-                  <a:txBody>
-                    <a:bodyPr/>
-                    <a:lstStyle/>
-                    <a:p>
-                      <a:r>
-                        <a:rPr sz="1100" b="0">
-                          <a:solidFill>
-                            <a:srgbClr val="1A2E1A"/>
-                          </a:solidFill>
-                          <a:latin typeface="Segoe UI"/>
-                        </a:rPr>
-                        <a:t>CFR pathway + cross-pathway transfer (CFR → road prompts unlock on take-over)</a:t>
-                      </a:r>
-                    </a:p>
-                  </a:txBody>
-                  <a:tcPr/>
-                </a:tc>
-              </a:tr>
-              <a:tr h="365760">
-                <a:tc>
-                  <a:txBody>
-                    <a:bodyPr/>
-                    <a:lstStyle/>
-                    <a:p>
-                      <a:r>
-                        <a:rPr sz="1100" b="0">
-                          <a:solidFill>
-                            <a:srgbClr val="1A2E1A"/>
-                          </a:solidFill>
-                          <a:latin typeface="Segoe UI"/>
-                        </a:rPr>
-                        <a:t>With IT</a:t>
-                      </a:r>
-                    </a:p>
-                  </a:txBody>
-                  <a:tcPr/>
-                </a:tc>
-                <a:tc>
-                  <a:txBody>
-                    <a:bodyPr/>
-                    <a:lstStyle/>
-                    <a:p>
-                      <a:r>
-                        <a:rPr sz="1100" b="0">
-                          <a:solidFill>
-                            <a:srgbClr val="1A2E1A"/>
-                          </a:solidFill>
-                          <a:latin typeface="Segoe UI"/>
-                        </a:rPr>
-                        <a:t>Wrapped iOS / Android app via Company Portal on trust-issued devices</a:t>
-                      </a:r>
-                    </a:p>
-                  </a:txBody>
-                  <a:tcPr/>
-                </a:tc>
-              </a:tr>
-              <a:tr h="365760">
-                <a:tc>
-                  <a:txBody>
-                    <a:bodyPr/>
-                    <a:lstStyle/>
-                    <a:p>
-                      <a:r>
-                        <a:rPr sz="1100" b="0">
-                          <a:solidFill>
-                            <a:srgbClr val="1A2E1A"/>
-                          </a:solidFill>
-                          <a:latin typeface="Segoe UI"/>
-                        </a:rPr>
-                        <a:t>Parallel</a:t>
-                      </a:r>
-                    </a:p>
-                  </a:txBody>
-                  <a:tcPr/>
-                </a:tc>
-                <a:tc>
-                  <a:txBody>
-                    <a:bodyPr/>
-                    <a:lstStyle/>
-                    <a:p>
-                      <a:r>
-                        <a:rPr sz="1100" b="0">
-                          <a:solidFill>
-                            <a:srgbClr val="1A2E1A"/>
-                          </a:solidFill>
-                          <a:latin typeface="Segoe UI"/>
-                        </a:rPr>
-                        <a:t>Paediatric clinical design and governance — separate app when signed off</a:t>
-                      </a:r>
-                    </a:p>
-                  </a:txBody>
-                  <a:tcPr/>
-                </a:tc>
-              </a:tr>
-              <a:tr h="365760">
-                <a:tc>
-                  <a:txBody>
-                    <a:bodyPr/>
-                    <a:lstStyle/>
-                    <a:p>
-                      <a:r>
-                        <a:rPr sz="1100" b="0">
-                          <a:solidFill>
-                            <a:srgbClr val="1A2E1A"/>
-                          </a:solidFill>
-                          <a:latin typeface="Segoe UI"/>
-                        </a:rPr>
-                        <a:t>Longer term</a:t>
-                      </a:r>
-                    </a:p>
-                  </a:txBody>
-                  <a:tcPr/>
-                </a:tc>
-                <a:tc>
-                  <a:txBody>
-                    <a:bodyPr/>
-                    <a:lstStyle/>
-                    <a:p>
-                      <a:r>
-                        <a:rPr sz="1100" b="0">
-                          <a:solidFill>
-                            <a:srgbClr val="1A2E1A"/>
-                          </a:solidFill>
-                          <a:latin typeface="Segoe UI"/>
-                        </a:rPr>
-                        <a:t>Training mode, handover summary PDF, trust-configurable rules without redeploy</a:t>
-                      </a:r>
-                    </a:p>
-                  </a:txBody>
-                  <a:tcPr/>
-                </a:tc>
-              </a:tr>
-            </a:tbl>
-          </a:graphicData>
-        </a:graphic>
-      </p:graphicFrame>
-      <p:sp>
-        <p:nvSpPr>
-          <p:cNvPr id="6" name="TextBox 5"/>
+              <a:t>Event log filters (planned)</a:t>
+            </a:r>
+          </a:p>
+        </p:txBody>
+      </p:sp>
+      <p:sp>
+        <p:nvSpPr>
+          <p:cNvPr id="5" name="TextBox 4"/>
           <p:cNvSpPr txBox="1"/>
           <p:nvPr/>
         </p:nvSpPr>
         <p:spPr>
           <a:xfrm>
-            <a:off x="777240" y="5897880"/>
-            <a:ext cx="10424160" cy="502920"/>
+            <a:off x="868680" y="1234440"/>
+            <a:ext cx="10332720" cy="4937760"/>
           </a:xfrm>
           <a:prstGeom prst="rect">
             <a:avLst/>
@@ -6515,6 +9083,125 @@
           <a:noFill/>
         </p:spPr>
         <p:txBody>
+          <a:bodyPr wrap="square">
+            <a:spAutoFit/>
+          </a:bodyPr>
+          <a:lstStyle/>
+          <a:p>
+            <a:pPr>
+              <a:spcAft>
+                <a:spcPts val="500"/>
+              </a:spcAft>
+            </a:pPr>
+            <a:r>
+              <a:rPr sz="1300" b="0">
+                <a:solidFill>
+                  <a:srgbClr val="1A2E1A"/>
+                </a:solidFill>
+                <a:latin typeface="Segoe UI"/>
+              </a:rPr>
+              <a:t>Filter the event log during review, debrief, or handover — full log stays intact; filters only change what is shown</a:t>
+            </a:r>
+          </a:p>
+          <a:p>
+            <a:pPr>
+              <a:spcAft>
+                <a:spcPts val="500"/>
+              </a:spcAft>
+            </a:pPr>
+            <a:r>
+              <a:rPr sz="1300" b="0">
+                <a:solidFill>
+                  <a:srgbClr val="1A2E1A"/>
+                </a:solidFill>
+                <a:latin typeface="Segoe UI"/>
+              </a:rPr>
+              <a:t>Suggested filters: Rhythm — rhythm checks, ROSC, cardiac arrest, and related entries</a:t>
+            </a:r>
+          </a:p>
+          <a:p>
+            <a:pPr>
+              <a:spcAft>
+                <a:spcPts val="500"/>
+              </a:spcAft>
+            </a:pPr>
+            <a:r>
+              <a:rPr sz="1300" b="0">
+                <a:solidFill>
+                  <a:srgbClr val="1A2E1A"/>
+                </a:solidFill>
+                <a:latin typeface="Segoe UI"/>
+              </a:rPr>
+              <a:t>Drugs — adrenaline, amiodarone, atropine, and other medication lines</a:t>
+            </a:r>
+          </a:p>
+          <a:p>
+            <a:pPr>
+              <a:spcAft>
+                <a:spcPts val="500"/>
+              </a:spcAft>
+            </a:pPr>
+            <a:r>
+              <a:rPr sz="1300" b="0">
+                <a:solidFill>
+                  <a:srgbClr val="1A2E1A"/>
+                </a:solidFill>
+                <a:latin typeface="Segoe UI"/>
+              </a:rPr>
+              <a:t>Shocks — defibrillation energies and shockable rhythm entries</a:t>
+            </a:r>
+          </a:p>
+          <a:p>
+            <a:pPr>
+              <a:spcAft>
+                <a:spcPts val="500"/>
+              </a:spcAft>
+            </a:pPr>
+            <a:r>
+              <a:rPr sz="1300" b="0">
+                <a:solidFill>
+                  <a:srgbClr val="1A2E1A"/>
+                </a:solidFill>
+                <a:latin typeface="Segoe UI"/>
+              </a:rPr>
+              <a:t>Interventions — airway, breathing, circulation, vascular access, and other logged actions</a:t>
+            </a:r>
+          </a:p>
+          <a:p>
+            <a:pPr>
+              <a:spcAft>
+                <a:spcPts val="500"/>
+              </a:spcAft>
+            </a:pPr>
+            <a:r>
+              <a:rPr sz="1300" b="0">
+                <a:solidFill>
+                  <a:srgbClr val="1A2E1A"/>
+                </a:solidFill>
+                <a:latin typeface="Segoe UI"/>
+              </a:rPr>
+              <a:t>Useful for quick handover summaries and post-case review without scrolling the entire timeline</a:t>
+            </a:r>
+          </a:p>
+        </p:txBody>
+      </p:sp>
+      <p:sp>
+        <p:nvSpPr>
+          <p:cNvPr id="6" name="TextBox 5"/>
+          <p:cNvSpPr txBox="1"/>
+          <p:nvPr/>
+        </p:nvSpPr>
+        <p:spPr>
+          <a:xfrm>
+            <a:off x="868680" y="5897880"/>
+            <a:ext cx="10332720" cy="502920"/>
+          </a:xfrm>
+          <a:prstGeom prst="rect">
+            <a:avLst/>
+          </a:prstGeom>
+          <a:noFill/>
+        </p:spPr>
+        <p:txBody>
           <a:bodyPr wrap="none">
             <a:spAutoFit/>
           </a:bodyPr>
@@ -6527,7 +9214,7 @@
                 </a:solidFill>
                 <a:latin typeface="Segoe UI"/>
               </a:rPr>
-              <a:t>All variants keep the same principle: data on device during the case; no cloud patient record.</a:t>
+              <a:t>Not in the current preview build — a future enhancement to the log viewer and export.</a:t>
             </a:r>
           </a:p>
         </p:txBody>
@@ -6540,7 +9227,7 @@
 </p:sld>
 </file>
 
-<file path=ppt/slides/slide19.xml><?xml version="1.0" encoding="utf-8"?>
+<file path=ppt/slides/slide25.xml><?xml version="1.0" encoding="utf-8"?>
 <p:sld xmlns:a="http://schemas.openxmlformats.org/drawingml/2006/main" xmlns:p="http://schemas.openxmlformats.org/presentationml/2006/main" xmlns:r="http://schemas.openxmlformats.org/officeDocument/2006/relationships">
   <p:cSld>
     <p:spTree>
@@ -6678,295 +9365,6 @@
                 <a:latin typeface="Segoe UI"/>
               </a:rPr>
               <a:t>jon@ostroforge.co.uk</a:t>
-            </a:r>
-          </a:p>
-        </p:txBody>
-      </p:sp>
-    </p:spTree>
-  </p:cSld>
-  <p:clrMapOvr>
-    <a:masterClrMapping/>
-  </p:clrMapOvr>
-</p:sld>
-</file>
-
-<file path=ppt/slides/slide2.xml><?xml version="1.0" encoding="utf-8"?>
-<p:sld xmlns:a="http://schemas.openxmlformats.org/drawingml/2006/main" xmlns:p="http://schemas.openxmlformats.org/presentationml/2006/main" xmlns:r="http://schemas.openxmlformats.org/officeDocument/2006/relationships">
-  <p:cSld>
-    <p:spTree>
-      <p:nvGrpSpPr>
-        <p:cNvPr id="1" name=""/>
-        <p:cNvGrpSpPr/>
-        <p:nvPr/>
-      </p:nvGrpSpPr>
-      <p:grpSpPr/>
-      <p:sp>
-        <p:nvSpPr>
-          <p:cNvPr id="2" name="Rectangle 1"/>
-          <p:cNvSpPr/>
-          <p:nvPr/>
-        </p:nvSpPr>
-        <p:spPr>
-          <a:xfrm>
-            <a:off x="0" y="0"/>
-            <a:ext cx="12191695" cy="6858000"/>
-          </a:xfrm>
-          <a:prstGeom prst="rect">
-            <a:avLst/>
-          </a:prstGeom>
-          <a:solidFill>
-            <a:srgbClr val="DFE8DF"/>
-          </a:solidFill>
-          <a:ln>
-            <a:noFill/>
-          </a:ln>
-        </p:spPr>
-        <p:style>
-          <a:lnRef idx="1">
-            <a:schemeClr val="accent1"/>
-          </a:lnRef>
-          <a:fillRef idx="3">
-            <a:schemeClr val="accent1"/>
-          </a:fillRef>
-          <a:effectRef idx="2">
-            <a:schemeClr val="accent1"/>
-          </a:effectRef>
-          <a:fontRef idx="minor">
-            <a:schemeClr val="lt1"/>
-          </a:fontRef>
-        </p:style>
-        <p:txBody>
-          <a:bodyPr rtlCol="0" anchor="ctr"/>
-          <a:lstStyle/>
-          <a:p>
-            <a:pPr algn="ctr"/>
-          </a:p>
-        </p:txBody>
-      </p:sp>
-      <p:sp>
-        <p:nvSpPr>
-          <p:cNvPr id="3" name="Rectangle 2"/>
-          <p:cNvSpPr/>
-          <p:nvPr/>
-        </p:nvSpPr>
-        <p:spPr>
-          <a:xfrm>
-            <a:off x="0" y="0"/>
-            <a:ext cx="12191695" cy="109728"/>
-          </a:xfrm>
-          <a:prstGeom prst="rect">
-            <a:avLst/>
-          </a:prstGeom>
-          <a:solidFill>
-            <a:srgbClr val="1F4F1F"/>
-          </a:solidFill>
-          <a:ln>
-            <a:noFill/>
-          </a:ln>
-        </p:spPr>
-        <p:style>
-          <a:lnRef idx="1">
-            <a:schemeClr val="accent1"/>
-          </a:lnRef>
-          <a:fillRef idx="3">
-            <a:schemeClr val="accent1"/>
-          </a:fillRef>
-          <a:effectRef idx="2">
-            <a:schemeClr val="accent1"/>
-          </a:effectRef>
-          <a:fontRef idx="minor">
-            <a:schemeClr val="lt1"/>
-          </a:fontRef>
-        </p:style>
-        <p:txBody>
-          <a:bodyPr rtlCol="0" anchor="ctr"/>
-          <a:lstStyle/>
-          <a:p>
-            <a:pPr algn="ctr"/>
-          </a:p>
-        </p:txBody>
-      </p:sp>
-      <p:sp>
-        <p:nvSpPr>
-          <p:cNvPr id="4" name="TextBox 3"/>
-          <p:cNvSpPr txBox="1"/>
-          <p:nvPr/>
-        </p:nvSpPr>
-        <p:spPr>
-          <a:xfrm>
-            <a:off x="777240" y="502920"/>
-            <a:ext cx="10515600" cy="640080"/>
-          </a:xfrm>
-          <a:prstGeom prst="rect">
-            <a:avLst/>
-          </a:prstGeom>
-          <a:noFill/>
-        </p:spPr>
-        <p:txBody>
-          <a:bodyPr wrap="none">
-            <a:spAutoFit/>
-          </a:bodyPr>
-          <a:lstStyle/>
-          <a:p>
-            <a:r>
-              <a:rPr sz="2600" b="1">
-                <a:solidFill>
-                  <a:srgbClr val="163816"/>
-                </a:solidFill>
-                <a:latin typeface="Segoe UI"/>
-              </a:rPr>
-              <a:t>App features — case flow &amp; timer</a:t>
-            </a:r>
-          </a:p>
-        </p:txBody>
-      </p:sp>
-      <p:sp>
-        <p:nvSpPr>
-          <p:cNvPr id="5" name="TextBox 4"/>
-          <p:cNvSpPr txBox="1"/>
-          <p:nvPr/>
-        </p:nvSpPr>
-        <p:spPr>
-          <a:xfrm>
-            <a:off x="868680" y="1234440"/>
-            <a:ext cx="10332720" cy="4937760"/>
-          </a:xfrm>
-          <a:prstGeom prst="rect">
-            <a:avLst/>
-          </a:prstGeom>
-          <a:noFill/>
-        </p:spPr>
-        <p:txBody>
-          <a:bodyPr wrap="square">
-            <a:spAutoFit/>
-          </a:bodyPr>
-          <a:lstStyle/>
-          <a:p>
-            <a:pPr>
-              <a:spcAft>
-                <a:spcPts val="500"/>
-              </a:spcAft>
-            </a:pPr>
-            <a:r>
-              <a:rPr sz="1300" b="0">
-                <a:solidFill>
-                  <a:srgbClr val="1A2E1A"/>
-                </a:solidFill>
-                <a:latin typeface="Segoe UI"/>
-              </a:rPr>
-              <a:t>Start protocol, initial assessment, and initial rhythm (VF / pVT, PEA, Asystole)</a:t>
-            </a:r>
-          </a:p>
-          <a:p>
-            <a:pPr>
-              <a:spcAft>
-                <a:spcPts val="500"/>
-              </a:spcAft>
-            </a:pPr>
-            <a:r>
-              <a:rPr sz="1300" b="0">
-                <a:solidFill>
-                  <a:srgbClr val="1A2E1A"/>
-                </a:solidFill>
-                <a:latin typeface="Segoe UI"/>
-              </a:rPr>
-              <a:t>Elapsed resuscitation timer with 2-minute rhythm-check countdown</a:t>
-            </a:r>
-          </a:p>
-          <a:p>
-            <a:pPr>
-              <a:spcAft>
-                <a:spcPts val="500"/>
-              </a:spcAft>
-            </a:pPr>
-            <a:r>
-              <a:rPr sz="1300" b="0">
-                <a:solidFill>
-                  <a:srgbClr val="1A2E1A"/>
-                </a:solidFill>
-                <a:latin typeface="Segoe UI"/>
-              </a:rPr>
-              <a:t>Shock logging (joules), total shock count, adrenaline / amiodarone due in timer bar</a:t>
-            </a:r>
-          </a:p>
-          <a:p>
-            <a:pPr>
-              <a:spcAft>
-                <a:spcPts val="500"/>
-              </a:spcAft>
-            </a:pPr>
-            <a:r>
-              <a:rPr sz="1300" b="0">
-                <a:solidFill>
-                  <a:srgbClr val="1A2E1A"/>
-                </a:solidFill>
-                <a:latin typeface="Segoe UI"/>
-              </a:rPr>
-              <a:t>Switch to ROSC mode or return to cardiac arrest (re-arrest) from timer bar</a:t>
-            </a:r>
-          </a:p>
-          <a:p>
-            <a:pPr>
-              <a:spcAft>
-                <a:spcPts val="500"/>
-              </a:spcAft>
-            </a:pPr>
-            <a:r>
-              <a:rPr sz="1300" b="0">
-                <a:solidFill>
-                  <a:srgbClr val="1A2E1A"/>
-                </a:solidFill>
-                <a:latin typeface="Segoe UI"/>
-              </a:rPr>
-              <a:t>TOR button, 45-minute termination review alert, and full TOR questionnaire</a:t>
-            </a:r>
-          </a:p>
-          <a:p>
-            <a:pPr>
-              <a:spcAft>
-                <a:spcPts val="500"/>
-              </a:spcAft>
-            </a:pPr>
-            <a:r>
-              <a:rPr sz="1300" b="0">
-                <a:solidFill>
-                  <a:srgbClr val="1A2E1A"/>
-                </a:solidFill>
-                <a:latin typeface="Segoe UI"/>
-              </a:rPr>
-              <a:t>Post-TOR verification-of-death wait and initial-assessment VoD (asystole observation)</a:t>
-            </a:r>
-          </a:p>
-          <a:p>
-            <a:pPr>
-              <a:spcAft>
-                <a:spcPts val="500"/>
-              </a:spcAft>
-            </a:pPr>
-            <a:r>
-              <a:rPr sz="1300" b="0">
-                <a:solidFill>
-                  <a:srgbClr val="1A2E1A"/>
-                </a:solidFill>
-                <a:latin typeface="Segoe UI"/>
-              </a:rPr>
-              <a:t>Patient handed over — stops timers, locks case, opens log</a:t>
-            </a:r>
-          </a:p>
-          <a:p>
-            <a:pPr>
-              <a:spcAft>
-                <a:spcPts val="500"/>
-              </a:spcAft>
-            </a:pPr>
-            <a:r>
-              <a:rPr sz="1300" b="0">
-                <a:solidFill>
-                  <a:srgbClr val="1A2E1A"/>
-                </a:solidFill>
-                <a:latin typeface="Segoe UI"/>
-              </a:rPr>
-              <a:t>Metronome on timer bar; night mode; screen stays awake during a case</a:t>
             </a:r>
           </a:p>
         </p:txBody>
@@ -7484,7 +9882,7 @@
             </a:r>
           </a:p>
           <a:p>
-            <a:pPr>
+            <a:pPr lvl="1">
               <a:spcAft>
                 <a:spcPts val="500"/>
               </a:spcAft>
@@ -7492,15 +9890,15 @@
             <a:r>
               <a:rPr sz="1300" b="0">
                 <a:solidFill>
-                  <a:srgbClr val="1A2E1A"/>
+                  <a:srgbClr val="4A5F4A"/>
                 </a:solidFill>
                 <a:latin typeface="Segoe UI"/>
               </a:rPr>
-              <a:t>Case transfer — pause timer, QR to another device, sender read-only when complete</a:t>
-            </a:r>
-          </a:p>
-          <a:p>
-            <a:pPr>
+              <a:t>WMAS / custom: Case transfer — pause timer, QR to another device, sender read-only when complete</a:t>
+            </a:r>
+          </a:p>
+          <a:p>
+            <a:pPr lvl="1">
               <a:spcAft>
                 <a:spcPts val="500"/>
               </a:spcAft>
@@ -7508,11 +9906,11 @@
             <a:r>
               <a:rPr sz="1300" b="0">
                 <a:solidFill>
-                  <a:srgbClr val="1A2E1A"/>
+                  <a:srgbClr val="4A5F4A"/>
                 </a:solidFill>
                 <a:latin typeface="Segoe UI"/>
               </a:rPr>
-              <a:t>Transfer warning if rhythm check or adrenaline due within one minute</a:t>
+              <a:t>WMAS / custom: Transfer warning if rhythm check or adrenaline due within one minute</a:t>
             </a:r>
           </a:p>
           <a:p>
@@ -7560,7 +9958,7 @@
                 </a:solidFill>
                 <a:latin typeface="Segoe UI"/>
               </a:rPr>
-              <a:t>During a case: header shows Transfer case and Night mode only</a:t>
+              <a:t>During a case: header shows Night mode; WMAS / custom builds also show Transfer case</a:t>
             </a:r>
           </a:p>
           <a:p>
@@ -7610,7 +10008,7 @@
                 </a:solidFill>
                 <a:latin typeface="Segoe UI"/>
               </a:rPr>
-              <a:t>Preview build v1.2.4 — features on preview URLs until merged to main.</a:t>
+              <a:t>Preview build v1.2.7 — features on preview URLs until merged to main.</a:t>
             </a:r>
           </a:p>
         </p:txBody>
@@ -7748,7 +10146,7 @@
                 </a:solidFill>
                 <a:latin typeface="Segoe UI"/>
               </a:rPr>
-              <a:t>Questions from the QI lead</a:t>
+              <a:t>Version history</a:t>
             </a:r>
           </a:p>
         </p:txBody>
@@ -7929,248 +10327,7 @@
                 </a:solidFill>
                 <a:latin typeface="Segoe UI"/>
               </a:rPr>
-              <a:t>1. What is its purpose?</a:t>
-            </a:r>
-          </a:p>
-        </p:txBody>
-      </p:sp>
-      <p:sp>
-        <p:nvSpPr>
-          <p:cNvPr id="5" name="TextBox 4"/>
-          <p:cNvSpPr txBox="1"/>
-          <p:nvPr/>
-        </p:nvSpPr>
-        <p:spPr>
-          <a:xfrm>
-            <a:off x="868680" y="1234440"/>
-            <a:ext cx="10332720" cy="4937760"/>
-          </a:xfrm>
-          <a:prstGeom prst="rect">
-            <a:avLst/>
-          </a:prstGeom>
-          <a:noFill/>
-        </p:spPr>
-        <p:txBody>
-          <a:bodyPr wrap="square">
-            <a:spAutoFit/>
-          </a:bodyPr>
-          <a:lstStyle/>
-          <a:p>
-            <a:pPr>
-              <a:spcAft>
-                <a:spcPts val="500"/>
-              </a:spcAft>
-            </a:pPr>
-            <a:r>
-              <a:rPr sz="1400" b="0">
-                <a:solidFill>
-                  <a:srgbClr val="1A2E1A"/>
-                </a:solidFill>
-                <a:latin typeface="Segoe UI"/>
-              </a:rPr>
-              <a:t>Guided timer + checklist for adult cardiac arrest (pre-hospital)</a:t>
-            </a:r>
-          </a:p>
-          <a:p>
-            <a:pPr>
-              <a:spcAft>
-                <a:spcPts val="500"/>
-              </a:spcAft>
-            </a:pPr>
-            <a:r>
-              <a:rPr sz="1400" b="0">
-                <a:solidFill>
-                  <a:srgbClr val="1A2E1A"/>
-                </a:solidFill>
-                <a:latin typeface="Segoe UI"/>
-              </a:rPr>
-              <a:t>Prompts rhythm checks, drugs, ROSC monitoring, TOR, and VoD in line with JRCALC / AACE</a:t>
-            </a:r>
-          </a:p>
-          <a:p>
-            <a:pPr>
-              <a:spcAft>
-                <a:spcPts val="500"/>
-              </a:spcAft>
-            </a:pPr>
-            <a:r>
-              <a:rPr sz="1400" b="0">
-                <a:solidFill>
-                  <a:srgbClr val="1A2E1A"/>
-                </a:solidFill>
-                <a:latin typeface="Segoe UI"/>
-              </a:rPr>
-              <a:t>Timestamped event log for handover, debrief, and QA</a:t>
-            </a:r>
-          </a:p>
-          <a:p>
-            <a:pPr>
-              <a:spcAft>
-                <a:spcPts val="500"/>
-              </a:spcAft>
-            </a:pPr>
-            <a:r>
-              <a:rPr sz="1400" b="0">
-                <a:solidFill>
-                  <a:srgbClr val="1A2E1A"/>
-                </a:solidFill>
-                <a:latin typeface="Segoe UI"/>
-              </a:rPr>
-              <a:t>WMAS build adds trust-specific prompts (e.g. CODE SHOCK to EOC)</a:t>
-            </a:r>
-          </a:p>
-          <a:p>
-            <a:pPr>
-              <a:spcAft>
-                <a:spcPts val="500"/>
-              </a:spcAft>
-            </a:pPr>
-            <a:r>
-              <a:rPr sz="1400" b="0">
-                <a:solidFill>
-                  <a:srgbClr val="1A2E1A"/>
-                </a:solidFill>
-                <a:latin typeface="Segoe UI"/>
-              </a:rPr>
-              <a:t>Support tool only — not a substitute for JRCALC, trust policy, or clinical judgement</a:t>
-            </a:r>
-          </a:p>
-        </p:txBody>
-      </p:sp>
-    </p:spTree>
-  </p:cSld>
-  <p:clrMapOvr>
-    <a:masterClrMapping/>
-  </p:clrMapOvr>
-</p:sld>
-</file>
-
-<file path=ppt/slides/slide7.xml><?xml version="1.0" encoding="utf-8"?>
-<p:sld xmlns:a="http://schemas.openxmlformats.org/drawingml/2006/main" xmlns:p="http://schemas.openxmlformats.org/presentationml/2006/main" xmlns:r="http://schemas.openxmlformats.org/officeDocument/2006/relationships">
-  <p:cSld>
-    <p:spTree>
-      <p:nvGrpSpPr>
-        <p:cNvPr id="1" name=""/>
-        <p:cNvGrpSpPr/>
-        <p:nvPr/>
-      </p:nvGrpSpPr>
-      <p:grpSpPr/>
-      <p:sp>
-        <p:nvSpPr>
-          <p:cNvPr id="2" name="Rectangle 1"/>
-          <p:cNvSpPr/>
-          <p:nvPr/>
-        </p:nvSpPr>
-        <p:spPr>
-          <a:xfrm>
-            <a:off x="0" y="0"/>
-            <a:ext cx="12191695" cy="6858000"/>
-          </a:xfrm>
-          <a:prstGeom prst="rect">
-            <a:avLst/>
-          </a:prstGeom>
-          <a:solidFill>
-            <a:srgbClr val="DFE8DF"/>
-          </a:solidFill>
-          <a:ln>
-            <a:noFill/>
-          </a:ln>
-        </p:spPr>
-        <p:style>
-          <a:lnRef idx="1">
-            <a:schemeClr val="accent1"/>
-          </a:lnRef>
-          <a:fillRef idx="3">
-            <a:schemeClr val="accent1"/>
-          </a:fillRef>
-          <a:effectRef idx="2">
-            <a:schemeClr val="accent1"/>
-          </a:effectRef>
-          <a:fontRef idx="minor">
-            <a:schemeClr val="lt1"/>
-          </a:fontRef>
-        </p:style>
-        <p:txBody>
-          <a:bodyPr rtlCol="0" anchor="ctr"/>
-          <a:lstStyle/>
-          <a:p>
-            <a:pPr algn="ctr"/>
-          </a:p>
-        </p:txBody>
-      </p:sp>
-      <p:sp>
-        <p:nvSpPr>
-          <p:cNvPr id="3" name="Rectangle 2"/>
-          <p:cNvSpPr/>
-          <p:nvPr/>
-        </p:nvSpPr>
-        <p:spPr>
-          <a:xfrm>
-            <a:off x="0" y="0"/>
-            <a:ext cx="12191695" cy="109728"/>
-          </a:xfrm>
-          <a:prstGeom prst="rect">
-            <a:avLst/>
-          </a:prstGeom>
-          <a:solidFill>
-            <a:srgbClr val="1F4F1F"/>
-          </a:solidFill>
-          <a:ln>
-            <a:noFill/>
-          </a:ln>
-        </p:spPr>
-        <p:style>
-          <a:lnRef idx="1">
-            <a:schemeClr val="accent1"/>
-          </a:lnRef>
-          <a:fillRef idx="3">
-            <a:schemeClr val="accent1"/>
-          </a:fillRef>
-          <a:effectRef idx="2">
-            <a:schemeClr val="accent1"/>
-          </a:effectRef>
-          <a:fontRef idx="minor">
-            <a:schemeClr val="lt1"/>
-          </a:fontRef>
-        </p:style>
-        <p:txBody>
-          <a:bodyPr rtlCol="0" anchor="ctr"/>
-          <a:lstStyle/>
-          <a:p>
-            <a:pPr algn="ctr"/>
-          </a:p>
-        </p:txBody>
-      </p:sp>
-      <p:sp>
-        <p:nvSpPr>
-          <p:cNvPr id="4" name="TextBox 3"/>
-          <p:cNvSpPr txBox="1"/>
-          <p:nvPr/>
-        </p:nvSpPr>
-        <p:spPr>
-          <a:xfrm>
-            <a:off x="777240" y="502920"/>
-            <a:ext cx="10515600" cy="640080"/>
-          </a:xfrm>
-          <a:prstGeom prst="rect">
-            <a:avLst/>
-          </a:prstGeom>
-          <a:noFill/>
-        </p:spPr>
-        <p:txBody>
-          <a:bodyPr wrap="none">
-            <a:spAutoFit/>
-          </a:bodyPr>
-          <a:lstStyle/>
-          <a:p>
-            <a:r>
-              <a:rPr sz="2600" b="1">
-                <a:solidFill>
-                  <a:srgbClr val="163816"/>
-                </a:solidFill>
-                <a:latin typeface="Segoe UI"/>
-              </a:rPr>
-              <a:t>2. What are you hoping to achieve?</a:t>
+              <a:t>Changelog from v1.0.0 (1 of 4)</a:t>
             </a:r>
           </a:p>
         </p:txBody>
@@ -8194,8 +10351,9 @@
                 <a:tableStyleId>{5C22544A-7EE6-4342-B048-85BDC9FD1C3A}</a:tableStyleId>
               </a:tblPr>
               <a:tblGrid>
-                <a:gridCol w="5212080"/>
-                <a:gridCol w="5212080"/>
+                <a:gridCol w="3474720"/>
+                <a:gridCol w="3474720"/>
+                <a:gridCol w="3474720"/>
               </a:tblGrid>
               <a:tr h="365760">
                 <a:tc>
@@ -8204,13 +10362,13 @@
                     <a:lstStyle/>
                     <a:p>
                       <a:r>
-                        <a:rPr sz="1200" b="1">
+                        <a:rPr sz="1100" b="1">
                           <a:solidFill>
                             <a:srgbClr val="FFFFFF"/>
                           </a:solidFill>
                           <a:latin typeface="Segoe UI"/>
                         </a:rPr>
-                        <a:t>Goal</a:t>
+                        <a:t>Version</a:t>
                       </a:r>
                     </a:p>
                   </a:txBody>
@@ -8226,13 +10384,13 @@
                     <a:lstStyle/>
                     <a:p>
                       <a:r>
-                        <a:rPr sz="1200" b="1">
+                        <a:rPr sz="1100" b="1">
                           <a:solidFill>
                             <a:srgbClr val="FFFFFF"/>
                           </a:solidFill>
                           <a:latin typeface="Segoe UI"/>
                         </a:rPr>
-                        <a:t>Why</a:t>
+                        <a:t>Released</a:t>
                       </a:r>
                     </a:p>
                   </a:txBody>
@@ -8242,6 +10400,28 @@
                     </a:solidFill>
                   </a:tcPr>
                 </a:tc>
+                <a:tc>
+                  <a:txBody>
+                    <a:bodyPr/>
+                    <a:lstStyle/>
+                    <a:p>
+                      <a:r>
+                        <a:rPr sz="1100" b="1">
+                          <a:solidFill>
+                            <a:srgbClr val="FFFFFF"/>
+                          </a:solidFill>
+                          <a:latin typeface="Segoe UI"/>
+                        </a:rPr>
+                        <a:t>Summary</a:t>
+                      </a:r>
+                    </a:p>
+                  </a:txBody>
+                  <a:tcPr>
+                    <a:solidFill>
+                      <a:srgbClr val="2D6A2D"/>
+                    </a:solidFill>
+                  </a:tcPr>
+                </a:tc>
               </a:tr>
               <a:tr h="365760">
                 <a:tc>
@@ -8250,31 +10430,49 @@
                     <a:lstStyle/>
                     <a:p>
                       <a:r>
-                        <a:rPr sz="1100" b="0">
-                          <a:solidFill>
-                            <a:srgbClr val="1A2E1A"/>
-                          </a:solidFill>
-                          <a:latin typeface="Segoe UI"/>
-                        </a:rPr>
-                        <a:t>Fewer missed rhythm checks / drug intervals</a:t>
-                      </a:r>
-                    </a:p>
-                  </a:txBody>
-                  <a:tcPr/>
-                </a:tc>
-                <a:tc>
-                  <a:txBody>
-                    <a:bodyPr/>
-                    <a:lstStyle/>
-                    <a:p>
-                      <a:r>
-                        <a:rPr sz="1100" b="0">
-                          <a:solidFill>
-                            <a:srgbClr val="1A2E1A"/>
-                          </a:solidFill>
-                          <a:latin typeface="Segoe UI"/>
-                        </a:rPr>
-                        <a:t>Offloads time-keeping from working memory</a:t>
+                        <a:rPr sz="900" b="0">
+                          <a:solidFill>
+                            <a:srgbClr val="1A2E1A"/>
+                          </a:solidFill>
+                          <a:latin typeface="Segoe UI"/>
+                        </a:rPr>
+                        <a:t>1.0.0</a:t>
+                      </a:r>
+                    </a:p>
+                  </a:txBody>
+                  <a:tcPr/>
+                </a:tc>
+                <a:tc>
+                  <a:txBody>
+                    <a:bodyPr/>
+                    <a:lstStyle/>
+                    <a:p>
+                      <a:r>
+                        <a:rPr sz="900" b="0">
+                          <a:solidFill>
+                            <a:srgbClr val="1A2E1A"/>
+                          </a:solidFill>
+                          <a:latin typeface="Segoe UI"/>
+                        </a:rPr>
+                        <a:t>27 May 2026</a:t>
+                      </a:r>
+                    </a:p>
+                  </a:txBody>
+                  <a:tcPr/>
+                </a:tc>
+                <a:tc>
+                  <a:txBody>
+                    <a:bodyPr/>
+                    <a:lstStyle/>
+                    <a:p>
+                      <a:r>
+                        <a:rPr sz="900" b="0">
+                          <a:solidFill>
+                            <a:srgbClr val="1A2E1A"/>
+                          </a:solidFill>
+                          <a:latin typeface="Segoe UI"/>
+                        </a:rPr>
+                        <a:t>Initial release — adult arrest timer and checklist; VF/pVT, PEA, Asystole; rhythm checks, adrenaline, amiodarone; ROSC, TOR, VoD; interventions; 4 Hs / 4 Ts; offline installable PWA</a:t>
                       </a:r>
                     </a:p>
                   </a:txBody>
@@ -8288,31 +10486,49 @@
                     <a:lstStyle/>
                     <a:p>
                       <a:r>
-                        <a:rPr sz="1100" b="0">
-                          <a:solidFill>
-                            <a:srgbClr val="1A2E1A"/>
-                          </a:solidFill>
-                          <a:latin typeface="Segoe UI"/>
-                        </a:rPr>
-                        <a:t>Consistent contemporaneous log</a:t>
-                      </a:r>
-                    </a:p>
-                  </a:txBody>
-                  <a:tcPr/>
-                </a:tc>
-                <a:tc>
-                  <a:txBody>
-                    <a:bodyPr/>
-                    <a:lstStyle/>
-                    <a:p>
-                      <a:r>
-                        <a:rPr sz="1100" b="0">
-                          <a:solidFill>
-                            <a:srgbClr val="1A2E1A"/>
-                          </a:solidFill>
-                          <a:latin typeface="Segoe UI"/>
-                        </a:rPr>
-                        <a:t>Handover, debrief, governance</a:t>
+                        <a:rPr sz="900" b="0">
+                          <a:solidFill>
+                            <a:srgbClr val="1A2E1A"/>
+                          </a:solidFill>
+                          <a:latin typeface="Segoe UI"/>
+                        </a:rPr>
+                        <a:t>1.0.1</a:t>
+                      </a:r>
+                    </a:p>
+                  </a:txBody>
+                  <a:tcPr/>
+                </a:tc>
+                <a:tc>
+                  <a:txBody>
+                    <a:bodyPr/>
+                    <a:lstStyle/>
+                    <a:p>
+                      <a:r>
+                        <a:rPr sz="900" b="0">
+                          <a:solidFill>
+                            <a:srgbClr val="1A2E1A"/>
+                          </a:solidFill>
+                          <a:latin typeface="Segoe UI"/>
+                        </a:rPr>
+                        <a:t>28 May 2026</a:t>
+                      </a:r>
+                    </a:p>
+                  </a:txBody>
+                  <a:tcPr/>
+                </a:tc>
+                <a:tc>
+                  <a:txBody>
+                    <a:bodyPr/>
+                    <a:lstStyle/>
+                    <a:p>
+                      <a:r>
+                        <a:rPr sz="900" b="0">
+                          <a:solidFill>
+                            <a:srgbClr val="1A2E1A"/>
+                          </a:solidFill>
+                          <a:latin typeface="Segoe UI"/>
+                        </a:rPr>
+                        <a:t>Multi-trust builds (Standard / WMAS); event log CSV/PDF export, share link and QR; saved logs; public blog; trust branding and separate deploy URLs</a:t>
                       </a:r>
                     </a:p>
                   </a:txBody>
@@ -8326,31 +10542,49 @@
                     <a:lstStyle/>
                     <a:p>
                       <a:r>
-                        <a:rPr sz="1100" b="0">
-                          <a:solidFill>
-                            <a:srgbClr val="1A2E1A"/>
-                          </a:solidFill>
-                          <a:latin typeface="Segoe UI"/>
-                        </a:rPr>
-                        <a:t>Structured end-of-case flows</a:t>
-                      </a:r>
-                    </a:p>
-                  </a:txBody>
-                  <a:tcPr/>
-                </a:tc>
-                <a:tc>
-                  <a:txBody>
-                    <a:bodyPr/>
-                    <a:lstStyle/>
-                    <a:p>
-                      <a:r>
-                        <a:rPr sz="1100" b="0">
-                          <a:solidFill>
-                            <a:srgbClr val="1A2E1A"/>
-                          </a:solidFill>
-                          <a:latin typeface="Segoe UI"/>
-                        </a:rPr>
-                        <a:t>ROSC, TOR, VoD, handover / transfer</a:t>
+                        <a:rPr sz="900" b="0">
+                          <a:solidFill>
+                            <a:srgbClr val="1A2E1A"/>
+                          </a:solidFill>
+                          <a:latin typeface="Segoe UI"/>
+                        </a:rPr>
+                        <a:t>1.1.0</a:t>
+                      </a:r>
+                    </a:p>
+                  </a:txBody>
+                  <a:tcPr/>
+                </a:tc>
+                <a:tc>
+                  <a:txBody>
+                    <a:bodyPr/>
+                    <a:lstStyle/>
+                    <a:p>
+                      <a:r>
+                        <a:rPr sz="900" b="0">
+                          <a:solidFill>
+                            <a:srgbClr val="1A2E1A"/>
+                          </a:solidFill>
+                          <a:latin typeface="Segoe UI"/>
+                        </a:rPr>
+                        <a:t>28 May 2026</a:t>
+                      </a:r>
+                    </a:p>
+                  </a:txBody>
+                  <a:tcPr/>
+                </a:tc>
+                <a:tc>
+                  <a:txBody>
+                    <a:bodyPr/>
+                    <a:lstStyle/>
+                    <a:p>
+                      <a:r>
+                        <a:rPr sz="900" b="0">
+                          <a:solidFill>
+                            <a:srgbClr val="1A2E1A"/>
+                          </a:solidFill>
+                          <a:latin typeface="Segoe UI"/>
+                        </a:rPr>
+                        <a:t>Screen wake lock during active case; confirm before starting new case; blog audience filter by trust</a:t>
                       </a:r>
                     </a:p>
                   </a:txBody>
@@ -8364,31 +10598,506 @@
                     <a:lstStyle/>
                     <a:p>
                       <a:r>
-                        <a:rPr sz="1100" b="0">
-                          <a:solidFill>
-                            <a:srgbClr val="1A2E1A"/>
-                          </a:solidFill>
-                          <a:latin typeface="Segoe UI"/>
-                        </a:rPr>
-                        <a:t>Low-friction pilot evaluation</a:t>
-                      </a:r>
-                    </a:p>
-                  </a:txBody>
-                  <a:tcPr/>
-                </a:tc>
-                <a:tc>
-                  <a:txBody>
-                    <a:bodyPr/>
-                    <a:lstStyle/>
-                    <a:p>
-                      <a:r>
-                        <a:rPr sz="1100" b="0">
-                          <a:solidFill>
-                            <a:srgbClr val="1A2E1A"/>
-                          </a:solidFill>
-                          <a:latin typeface="Segoe UI"/>
-                        </a:rPr>
-                        <a:t>PWA on phone or tablet — no app store</a:t>
+                        <a:rPr sz="900" b="0">
+                          <a:solidFill>
+                            <a:srgbClr val="1A2E1A"/>
+                          </a:solidFill>
+                          <a:latin typeface="Segoe UI"/>
+                        </a:rPr>
+                        <a:t>1.1.1</a:t>
+                      </a:r>
+                    </a:p>
+                  </a:txBody>
+                  <a:tcPr/>
+                </a:tc>
+                <a:tc>
+                  <a:txBody>
+                    <a:bodyPr/>
+                    <a:lstStyle/>
+                    <a:p>
+                      <a:r>
+                        <a:rPr sz="900" b="0">
+                          <a:solidFill>
+                            <a:srgbClr val="1A2E1A"/>
+                          </a:solidFill>
+                          <a:latin typeface="Segoe UI"/>
+                        </a:rPr>
+                        <a:t>28–31 May 2026</a:t>
+                      </a:r>
+                    </a:p>
+                  </a:txBody>
+                  <a:tcPr/>
+                </a:tc>
+                <a:tc>
+                  <a:txBody>
+                    <a:bodyPr/>
+                    <a:lstStyle/>
+                    <a:p>
+                      <a:r>
+                        <a:rPr sz="900" b="0">
+                          <a:solidFill>
+                            <a:srgbClr val="1A2E1A"/>
+                          </a:solidFill>
+                          <a:latin typeface="Segoe UI"/>
+                        </a:rPr>
+                        <a:t>Documents modal (ALS algorithm); prolonged VF reminder; TOR special circumstances and reassessment; VoD observation flow; CODE SHOCK and WMAS ToR document (WMAS); preview speed controls; needle decompression</a:t>
+                      </a:r>
+                    </a:p>
+                  </a:txBody>
+                  <a:tcPr/>
+                </a:tc>
+              </a:tr>
+            </a:tbl>
+          </a:graphicData>
+        </a:graphic>
+      </p:graphicFrame>
+    </p:spTree>
+  </p:cSld>
+  <p:clrMapOvr>
+    <a:masterClrMapping/>
+  </p:clrMapOvr>
+</p:sld>
+</file>
+
+<file path=ppt/slides/slide7.xml><?xml version="1.0" encoding="utf-8"?>
+<p:sld xmlns:a="http://schemas.openxmlformats.org/drawingml/2006/main" xmlns:p="http://schemas.openxmlformats.org/presentationml/2006/main" xmlns:r="http://schemas.openxmlformats.org/officeDocument/2006/relationships">
+  <p:cSld>
+    <p:spTree>
+      <p:nvGrpSpPr>
+        <p:cNvPr id="1" name=""/>
+        <p:cNvGrpSpPr/>
+        <p:nvPr/>
+      </p:nvGrpSpPr>
+      <p:grpSpPr/>
+      <p:sp>
+        <p:nvSpPr>
+          <p:cNvPr id="2" name="Rectangle 1"/>
+          <p:cNvSpPr/>
+          <p:nvPr/>
+        </p:nvSpPr>
+        <p:spPr>
+          <a:xfrm>
+            <a:off x="0" y="0"/>
+            <a:ext cx="12191695" cy="6858000"/>
+          </a:xfrm>
+          <a:prstGeom prst="rect">
+            <a:avLst/>
+          </a:prstGeom>
+          <a:solidFill>
+            <a:srgbClr val="DFE8DF"/>
+          </a:solidFill>
+          <a:ln>
+            <a:noFill/>
+          </a:ln>
+        </p:spPr>
+        <p:style>
+          <a:lnRef idx="1">
+            <a:schemeClr val="accent1"/>
+          </a:lnRef>
+          <a:fillRef idx="3">
+            <a:schemeClr val="accent1"/>
+          </a:fillRef>
+          <a:effectRef idx="2">
+            <a:schemeClr val="accent1"/>
+          </a:effectRef>
+          <a:fontRef idx="minor">
+            <a:schemeClr val="lt1"/>
+          </a:fontRef>
+        </p:style>
+        <p:txBody>
+          <a:bodyPr rtlCol="0" anchor="ctr"/>
+          <a:lstStyle/>
+          <a:p>
+            <a:pPr algn="ctr"/>
+          </a:p>
+        </p:txBody>
+      </p:sp>
+      <p:sp>
+        <p:nvSpPr>
+          <p:cNvPr id="3" name="Rectangle 2"/>
+          <p:cNvSpPr/>
+          <p:nvPr/>
+        </p:nvSpPr>
+        <p:spPr>
+          <a:xfrm>
+            <a:off x="0" y="0"/>
+            <a:ext cx="12191695" cy="109728"/>
+          </a:xfrm>
+          <a:prstGeom prst="rect">
+            <a:avLst/>
+          </a:prstGeom>
+          <a:solidFill>
+            <a:srgbClr val="1F4F1F"/>
+          </a:solidFill>
+          <a:ln>
+            <a:noFill/>
+          </a:ln>
+        </p:spPr>
+        <p:style>
+          <a:lnRef idx="1">
+            <a:schemeClr val="accent1"/>
+          </a:lnRef>
+          <a:fillRef idx="3">
+            <a:schemeClr val="accent1"/>
+          </a:fillRef>
+          <a:effectRef idx="2">
+            <a:schemeClr val="accent1"/>
+          </a:effectRef>
+          <a:fontRef idx="minor">
+            <a:schemeClr val="lt1"/>
+          </a:fontRef>
+        </p:style>
+        <p:txBody>
+          <a:bodyPr rtlCol="0" anchor="ctr"/>
+          <a:lstStyle/>
+          <a:p>
+            <a:pPr algn="ctr"/>
+          </a:p>
+        </p:txBody>
+      </p:sp>
+      <p:sp>
+        <p:nvSpPr>
+          <p:cNvPr id="4" name="TextBox 3"/>
+          <p:cNvSpPr txBox="1"/>
+          <p:nvPr/>
+        </p:nvSpPr>
+        <p:spPr>
+          <a:xfrm>
+            <a:off x="777240" y="502920"/>
+            <a:ext cx="10515600" cy="640080"/>
+          </a:xfrm>
+          <a:prstGeom prst="rect">
+            <a:avLst/>
+          </a:prstGeom>
+          <a:noFill/>
+        </p:spPr>
+        <p:txBody>
+          <a:bodyPr wrap="none">
+            <a:spAutoFit/>
+          </a:bodyPr>
+          <a:lstStyle/>
+          <a:p>
+            <a:r>
+              <a:rPr sz="2600" b="1">
+                <a:solidFill>
+                  <a:srgbClr val="163816"/>
+                </a:solidFill>
+                <a:latin typeface="Segoe UI"/>
+              </a:rPr>
+              <a:t>Changelog from v1.0.0 (2 of 4)</a:t>
+            </a:r>
+          </a:p>
+        </p:txBody>
+      </p:sp>
+      <p:graphicFrame>
+        <p:nvGraphicFramePr>
+          <p:cNvPr id="5" name="Table 4"/>
+          <p:cNvGraphicFramePr>
+            <a:graphicFrameLocks noGrp="1"/>
+          </p:cNvGraphicFramePr>
+          <p:nvPr/>
+        </p:nvGraphicFramePr>
+        <p:xfrm>
+          <a:off x="777240" y="1188720"/>
+          <a:ext cx="10424160" cy="1828800"/>
+        </p:xfrm>
+        <a:graphic>
+          <a:graphicData uri="http://schemas.openxmlformats.org/drawingml/2006/table">
+            <a:tbl>
+              <a:tblPr firstRow="1" bandRow="1">
+                <a:tableStyleId>{5C22544A-7EE6-4342-B048-85BDC9FD1C3A}</a:tableStyleId>
+              </a:tblPr>
+              <a:tblGrid>
+                <a:gridCol w="3474720"/>
+                <a:gridCol w="3474720"/>
+                <a:gridCol w="3474720"/>
+              </a:tblGrid>
+              <a:tr h="365760">
+                <a:tc>
+                  <a:txBody>
+                    <a:bodyPr/>
+                    <a:lstStyle/>
+                    <a:p>
+                      <a:r>
+                        <a:rPr sz="1100" b="1">
+                          <a:solidFill>
+                            <a:srgbClr val="FFFFFF"/>
+                          </a:solidFill>
+                          <a:latin typeface="Segoe UI"/>
+                        </a:rPr>
+                        <a:t>Version</a:t>
+                      </a:r>
+                    </a:p>
+                  </a:txBody>
+                  <a:tcPr>
+                    <a:solidFill>
+                      <a:srgbClr val="2D6A2D"/>
+                    </a:solidFill>
+                  </a:tcPr>
+                </a:tc>
+                <a:tc>
+                  <a:txBody>
+                    <a:bodyPr/>
+                    <a:lstStyle/>
+                    <a:p>
+                      <a:r>
+                        <a:rPr sz="1100" b="1">
+                          <a:solidFill>
+                            <a:srgbClr val="FFFFFF"/>
+                          </a:solidFill>
+                          <a:latin typeface="Segoe UI"/>
+                        </a:rPr>
+                        <a:t>Released</a:t>
+                      </a:r>
+                    </a:p>
+                  </a:txBody>
+                  <a:tcPr>
+                    <a:solidFill>
+                      <a:srgbClr val="2D6A2D"/>
+                    </a:solidFill>
+                  </a:tcPr>
+                </a:tc>
+                <a:tc>
+                  <a:txBody>
+                    <a:bodyPr/>
+                    <a:lstStyle/>
+                    <a:p>
+                      <a:r>
+                        <a:rPr sz="1100" b="1">
+                          <a:solidFill>
+                            <a:srgbClr val="FFFFFF"/>
+                          </a:solidFill>
+                          <a:latin typeface="Segoe UI"/>
+                        </a:rPr>
+                        <a:t>Summary</a:t>
+                      </a:r>
+                    </a:p>
+                  </a:txBody>
+                  <a:tcPr>
+                    <a:solidFill>
+                      <a:srgbClr val="2D6A2D"/>
+                    </a:solidFill>
+                  </a:tcPr>
+                </a:tc>
+              </a:tr>
+              <a:tr h="365760">
+                <a:tc>
+                  <a:txBody>
+                    <a:bodyPr/>
+                    <a:lstStyle/>
+                    <a:p>
+                      <a:r>
+                        <a:rPr sz="900" b="0">
+                          <a:solidFill>
+                            <a:srgbClr val="1A2E1A"/>
+                          </a:solidFill>
+                          <a:latin typeface="Segoe UI"/>
+                        </a:rPr>
+                        <a:t>1.1.2</a:t>
+                      </a:r>
+                    </a:p>
+                  </a:txBody>
+                  <a:tcPr/>
+                </a:tc>
+                <a:tc>
+                  <a:txBody>
+                    <a:bodyPr/>
+                    <a:lstStyle/>
+                    <a:p>
+                      <a:r>
+                        <a:rPr sz="900" b="0">
+                          <a:solidFill>
+                            <a:srgbClr val="1A2E1A"/>
+                          </a:solidFill>
+                          <a:latin typeface="Segoe UI"/>
+                        </a:rPr>
+                        <a:t>2 Jun 2026</a:t>
+                      </a:r>
+                    </a:p>
+                  </a:txBody>
+                  <a:tcPr/>
+                </a:tc>
+                <a:tc>
+                  <a:txBody>
+                    <a:bodyPr/>
+                    <a:lstStyle/>
+                    <a:p>
+                      <a:r>
+                        <a:rPr sz="900" b="0">
+                          <a:solidFill>
+                            <a:srgbClr val="1A2E1A"/>
+                          </a:solidFill>
+                          <a:latin typeface="Segoe UI"/>
+                        </a:rPr>
+                        <a:t>Clinical alerts one at a time; autosave logs and multi-delete; continue case within 10 minutes; DEMO preview icons; preview startup warning</a:t>
+                      </a:r>
+                    </a:p>
+                  </a:txBody>
+                  <a:tcPr/>
+                </a:tc>
+              </a:tr>
+              <a:tr h="365760">
+                <a:tc>
+                  <a:txBody>
+                    <a:bodyPr/>
+                    <a:lstStyle/>
+                    <a:p>
+                      <a:r>
+                        <a:rPr sz="900" b="0">
+                          <a:solidFill>
+                            <a:srgbClr val="1A2E1A"/>
+                          </a:solidFill>
+                          <a:latin typeface="Segoe UI"/>
+                        </a:rPr>
+                        <a:t>1.2.0</a:t>
+                      </a:r>
+                    </a:p>
+                  </a:txBody>
+                  <a:tcPr/>
+                </a:tc>
+                <a:tc>
+                  <a:txBody>
+                    <a:bodyPr/>
+                    <a:lstStyle/>
+                    <a:p>
+                      <a:r>
+                        <a:rPr sz="900" b="0">
+                          <a:solidFill>
+                            <a:srgbClr val="1A2E1A"/>
+                          </a:solidFill>
+                          <a:latin typeface="Segoe UI"/>
+                        </a:rPr>
+                        <a:t>2 Jun 2026</a:t>
+                      </a:r>
+                    </a:p>
+                  </a:txBody>
+                  <a:tcPr/>
+                </a:tc>
+                <a:tc>
+                  <a:txBody>
+                    <a:bodyPr/>
+                    <a:lstStyle/>
+                    <a:p>
+                      <a:r>
+                        <a:rPr sz="900" b="0">
+                          <a:solidFill>
+                            <a:srgbClr val="1A2E1A"/>
+                          </a:solidFill>
+                          <a:latin typeface="Segoe UI"/>
+                        </a:rPr>
+                        <a:t>Case transfer — pause timer, QR handoff to another device, sender read-only when complete</a:t>
+                      </a:r>
+                    </a:p>
+                  </a:txBody>
+                  <a:tcPr/>
+                </a:tc>
+              </a:tr>
+              <a:tr h="365760">
+                <a:tc>
+                  <a:txBody>
+                    <a:bodyPr/>
+                    <a:lstStyle/>
+                    <a:p>
+                      <a:r>
+                        <a:rPr sz="900" b="0">
+                          <a:solidFill>
+                            <a:srgbClr val="1A2E1A"/>
+                          </a:solidFill>
+                          <a:latin typeface="Segoe UI"/>
+                        </a:rPr>
+                        <a:t>1.2.1</a:t>
+                      </a:r>
+                    </a:p>
+                  </a:txBody>
+                  <a:tcPr/>
+                </a:tc>
+                <a:tc>
+                  <a:txBody>
+                    <a:bodyPr/>
+                    <a:lstStyle/>
+                    <a:p>
+                      <a:r>
+                        <a:rPr sz="900" b="0">
+                          <a:solidFill>
+                            <a:srgbClr val="1A2E1A"/>
+                          </a:solidFill>
+                          <a:latin typeface="Segoe UI"/>
+                        </a:rPr>
+                        <a:t>2 Jun 2026</a:t>
+                      </a:r>
+                    </a:p>
+                  </a:txBody>
+                  <a:tcPr/>
+                </a:tc>
+                <a:tc>
+                  <a:txBody>
+                    <a:bodyPr/>
+                    <a:lstStyle/>
+                    <a:p>
+                      <a:r>
+                        <a:rPr sz="900" b="0">
+                          <a:solidFill>
+                            <a:srgbClr val="1A2E1A"/>
+                          </a:solidFill>
+                          <a:latin typeface="Segoe UI"/>
+                        </a:rPr>
+                        <a:t>Transfer warning if check or adrenaline due soon; Cardiac arrest button from ROSC (re-arrest); sustained ROSC alert; SBP/pulse reminder fixes</a:t>
+                      </a:r>
+                    </a:p>
+                  </a:txBody>
+                  <a:tcPr/>
+                </a:tc>
+              </a:tr>
+              <a:tr h="365760">
+                <a:tc>
+                  <a:txBody>
+                    <a:bodyPr/>
+                    <a:lstStyle/>
+                    <a:p>
+                      <a:r>
+                        <a:rPr sz="900" b="0">
+                          <a:solidFill>
+                            <a:srgbClr val="1A2E1A"/>
+                          </a:solidFill>
+                          <a:latin typeface="Segoe UI"/>
+                        </a:rPr>
+                        <a:t>1.2.2</a:t>
+                      </a:r>
+                    </a:p>
+                  </a:txBody>
+                  <a:tcPr/>
+                </a:tc>
+                <a:tc>
+                  <a:txBody>
+                    <a:bodyPr/>
+                    <a:lstStyle/>
+                    <a:p>
+                      <a:r>
+                        <a:rPr sz="900" b="0">
+                          <a:solidFill>
+                            <a:srgbClr val="1A2E1A"/>
+                          </a:solidFill>
+                          <a:latin typeface="Segoe UI"/>
+                        </a:rPr>
+                        <a:t>4 Jun 2026</a:t>
+                      </a:r>
+                    </a:p>
+                  </a:txBody>
+                  <a:tcPr/>
+                </a:tc>
+                <a:tc>
+                  <a:txBody>
+                    <a:bodyPr/>
+                    <a:lstStyle/>
+                    <a:p>
+                      <a:r>
+                        <a:rPr sz="900" b="0">
+                          <a:solidFill>
+                            <a:srgbClr val="1A2E1A"/>
+                          </a:solidFill>
+                          <a:latin typeface="Segoe UI"/>
+                        </a:rPr>
+                        <a:t>WMAS CODE SHOCK only when initial rhythm was VF / pVT (not after non-shockable initial rhythm)</a:t>
                       </a:r>
                     </a:p>
                   </a:txBody>
@@ -8532,7 +11241,7 @@
                 </a:solidFill>
                 <a:latin typeface="Segoe UI"/>
               </a:rPr>
-              <a:t>3. Are you trying to replace something?</a:t>
+              <a:t>Changelog from v1.0.0 (3 of 4)</a:t>
             </a:r>
           </a:p>
         </p:txBody>
@@ -8556,8 +11265,9 @@
                 <a:tableStyleId>{5C22544A-7EE6-4342-B048-85BDC9FD1C3A}</a:tableStyleId>
               </a:tblPr>
               <a:tblGrid>
-                <a:gridCol w="5212080"/>
-                <a:gridCol w="5212080"/>
+                <a:gridCol w="3474720"/>
+                <a:gridCol w="3474720"/>
+                <a:gridCol w="3474720"/>
               </a:tblGrid>
               <a:tr h="365760">
                 <a:tc>
@@ -8566,13 +11276,13 @@
                     <a:lstStyle/>
                     <a:p>
                       <a:r>
-                        <a:rPr sz="1200" b="1">
+                        <a:rPr sz="1100" b="1">
                           <a:solidFill>
                             <a:srgbClr val="FFFFFF"/>
                           </a:solidFill>
                           <a:latin typeface="Segoe UI"/>
                         </a:rPr>
-                        <a:t>Today</a:t>
+                        <a:t>Version</a:t>
                       </a:r>
                     </a:p>
                   </a:txBody>
@@ -8588,13 +11298,13 @@
                     <a:lstStyle/>
                     <a:p>
                       <a:r>
-                        <a:rPr sz="1200" b="1">
+                        <a:rPr sz="1100" b="1">
                           <a:solidFill>
                             <a:srgbClr val="FFFFFF"/>
                           </a:solidFill>
                           <a:latin typeface="Segoe UI"/>
                         </a:rPr>
-                        <a:t>Resusci-Time</a:t>
+                        <a:t>Released</a:t>
                       </a:r>
                     </a:p>
                   </a:txBody>
@@ -8604,6 +11314,28 @@
                     </a:solidFill>
                   </a:tcPr>
                 </a:tc>
+                <a:tc>
+                  <a:txBody>
+                    <a:bodyPr/>
+                    <a:lstStyle/>
+                    <a:p>
+                      <a:r>
+                        <a:rPr sz="1100" b="1">
+                          <a:solidFill>
+                            <a:srgbClr val="FFFFFF"/>
+                          </a:solidFill>
+                          <a:latin typeface="Segoe UI"/>
+                        </a:rPr>
+                        <a:t>Summary</a:t>
+                      </a:r>
+                    </a:p>
+                  </a:txBody>
+                  <a:tcPr>
+                    <a:solidFill>
+                      <a:srgbClr val="2D6A2D"/>
+                    </a:solidFill>
+                  </a:tcPr>
+                </a:tc>
               </a:tr>
               <a:tr h="365760">
                 <a:tc>
@@ -8612,31 +11344,49 @@
                     <a:lstStyle/>
                     <a:p>
                       <a:r>
-                        <a:rPr sz="1100" b="0">
-                          <a:solidFill>
-                            <a:srgbClr val="1A2E1A"/>
-                          </a:solidFill>
-                          <a:latin typeface="Segoe UI"/>
-                        </a:rPr>
-                        <a:t>JRCALC / paper protocols</a:t>
-                      </a:r>
-                    </a:p>
-                  </a:txBody>
-                  <a:tcPr/>
-                </a:tc>
-                <a:tc>
-                  <a:txBody>
-                    <a:bodyPr/>
-                    <a:lstStyle/>
-                    <a:p>
-                      <a:r>
-                        <a:rPr sz="1100" b="0">
-                          <a:solidFill>
-                            <a:srgbClr val="1A2E1A"/>
-                          </a:solidFill>
-                          <a:latin typeface="Segoe UI"/>
-                        </a:rPr>
-                        <a:t>Same guidance — adds active timer + log</a:t>
+                        <a:rPr sz="900" b="0">
+                          <a:solidFill>
+                            <a:srgbClr val="1A2E1A"/>
+                          </a:solidFill>
+                          <a:latin typeface="Segoe UI"/>
+                        </a:rPr>
+                        <a:t>1.2.3</a:t>
+                      </a:r>
+                    </a:p>
+                  </a:txBody>
+                  <a:tcPr/>
+                </a:tc>
+                <a:tc>
+                  <a:txBody>
+                    <a:bodyPr/>
+                    <a:lstStyle/>
+                    <a:p>
+                      <a:r>
+                        <a:rPr sz="900" b="0">
+                          <a:solidFill>
+                            <a:srgbClr val="1A2E1A"/>
+                          </a:solidFill>
+                          <a:latin typeface="Segoe UI"/>
+                        </a:rPr>
+                        <a:t>6 Jun 2026</a:t>
+                      </a:r>
+                    </a:p>
+                  </a:txBody>
+                  <a:tcPr/>
+                </a:tc>
+                <a:tc>
+                  <a:txBody>
+                    <a:bodyPr/>
+                    <a:lstStyle/>
+                    <a:p>
+                      <a:r>
+                        <a:rPr sz="900" b="0">
+                          <a:solidFill>
+                            <a:srgbClr val="1A2E1A"/>
+                          </a:solidFill>
+                          <a:latin typeface="Segoe UI"/>
+                        </a:rPr>
+                        <a:t>Patient handed over flow; timer bar layout and colours; hamburger menu; acknowledgements page; About updates</a:t>
                       </a:r>
                     </a:p>
                   </a:txBody>
@@ -8650,31 +11400,49 @@
                     <a:lstStyle/>
                     <a:p>
                       <a:r>
-                        <a:rPr sz="1100" b="0">
-                          <a:solidFill>
-                            <a:srgbClr val="1A2E1A"/>
-                          </a:solidFill>
-                          <a:latin typeface="Segoe UI"/>
-                        </a:rPr>
-                        <a:t>Informal timing / mental tracking</a:t>
-                      </a:r>
-                    </a:p>
-                  </a:txBody>
-                  <a:tcPr/>
-                </a:tc>
-                <a:tc>
-                  <a:txBody>
-                    <a:bodyPr/>
-                    <a:lstStyle/>
-                    <a:p>
-                      <a:r>
-                        <a:rPr sz="1100" b="0">
-                          <a:solidFill>
-                            <a:srgbClr val="1A2E1A"/>
-                          </a:solidFill>
-                          <a:latin typeface="Segoe UI"/>
-                        </a:rPr>
-                        <a:t>Supplements, does not remove team leader role</a:t>
+                        <a:rPr sz="900" b="0">
+                          <a:solidFill>
+                            <a:srgbClr val="1A2E1A"/>
+                          </a:solidFill>
+                          <a:latin typeface="Segoe UI"/>
+                        </a:rPr>
+                        <a:t>1.2.4</a:t>
+                      </a:r>
+                    </a:p>
+                  </a:txBody>
+                  <a:tcPr/>
+                </a:tc>
+                <a:tc>
+                  <a:txBody>
+                    <a:bodyPr/>
+                    <a:lstStyle/>
+                    <a:p>
+                      <a:r>
+                        <a:rPr sz="900" b="0">
+                          <a:solidFill>
+                            <a:srgbClr val="1A2E1A"/>
+                          </a:solidFill>
+                          <a:latin typeface="Segoe UI"/>
+                        </a:rPr>
+                        <a:t>7 Jun 2026</a:t>
+                      </a:r>
+                    </a:p>
+                  </a:txBody>
+                  <a:tcPr/>
+                </a:tc>
+                <a:tc>
+                  <a:txBody>
+                    <a:bodyPr/>
+                    <a:lstStyle/>
+                    <a:p>
+                      <a:r>
+                        <a:rPr sz="900" b="0">
+                          <a:solidFill>
+                            <a:srgbClr val="1A2E1A"/>
+                          </a:solidFill>
+                          <a:latin typeface="Segoe UI"/>
+                        </a:rPr>
+                        <a:t>Preview debug report export (menu); session timeline and error capture for testers</a:t>
                       </a:r>
                     </a:p>
                   </a:txBody>
@@ -8688,31 +11456,49 @@
                     <a:lstStyle/>
                     <a:p>
                       <a:r>
-                        <a:rPr sz="1100" b="0">
-                          <a:solidFill>
-                            <a:srgbClr val="1A2E1A"/>
-                          </a:solidFill>
-                          <a:latin typeface="Segoe UI"/>
-                        </a:rPr>
-                        <a:t>EPR / PRF</a:t>
-                      </a:r>
-                    </a:p>
-                  </a:txBody>
-                  <a:tcPr/>
-                </a:tc>
-                <a:tc>
-                  <a:txBody>
-                    <a:bodyPr/>
-                    <a:lstStyle/>
-                    <a:p>
-                      <a:r>
-                        <a:rPr sz="1100" b="0">
-                          <a:solidFill>
-                            <a:srgbClr val="1A2E1A"/>
-                          </a:solidFill>
-                          <a:latin typeface="Segoe UI"/>
-                        </a:rPr>
-                        <a:t>Export may help after the event — not a replacement</a:t>
+                        <a:rPr sz="900" b="0">
+                          <a:solidFill>
+                            <a:srgbClr val="1A2E1A"/>
+                          </a:solidFill>
+                          <a:latin typeface="Segoe UI"/>
+                        </a:rPr>
+                        <a:t>1.2.5</a:t>
+                      </a:r>
+                    </a:p>
+                  </a:txBody>
+                  <a:tcPr/>
+                </a:tc>
+                <a:tc>
+                  <a:txBody>
+                    <a:bodyPr/>
+                    <a:lstStyle/>
+                    <a:p>
+                      <a:r>
+                        <a:rPr sz="900" b="0">
+                          <a:solidFill>
+                            <a:srgbClr val="1A2E1A"/>
+                          </a:solidFill>
+                          <a:latin typeface="Segoe UI"/>
+                        </a:rPr>
+                        <a:t>9 Jun 2026</a:t>
+                      </a:r>
+                    </a:p>
+                  </a:txBody>
+                  <a:tcPr/>
+                </a:tc>
+                <a:tc>
+                  <a:txBody>
+                    <a:bodyPr/>
+                    <a:lstStyle/>
+                    <a:p>
+                      <a:r>
+                        <a:rPr sz="900" b="0">
+                          <a:solidFill>
+                            <a:srgbClr val="1A2E1A"/>
+                          </a:solidFill>
+                          <a:latin typeface="Segoe UI"/>
+                        </a:rPr>
+                        <a:t>Metronome stops on ROSC but resumes on re-arrest if still on; preview changelog and landing-page version deploy fixes</a:t>
                       </a:r>
                     </a:p>
                   </a:txBody>
@@ -8726,31 +11512,49 @@
                     <a:lstStyle/>
                     <a:p>
                       <a:r>
-                        <a:rPr sz="1100" b="0">
-                          <a:solidFill>
-                            <a:srgbClr val="1A2E1A"/>
-                          </a:solidFill>
-                          <a:latin typeface="Segoe UI"/>
-                        </a:rPr>
-                        <a:t>Another mandated arrest app</a:t>
-                      </a:r>
-                    </a:p>
-                  </a:txBody>
-                  <a:tcPr/>
-                </a:tc>
-                <a:tc>
-                  <a:txBody>
-                    <a:bodyPr/>
-                    <a:lstStyle/>
-                    <a:p>
-                      <a:r>
-                        <a:rPr sz="1100" b="0">
-                          <a:solidFill>
-                            <a:srgbClr val="1A2E1A"/>
-                          </a:solidFill>
-                          <a:latin typeface="Segoe UI"/>
-                        </a:rPr>
-                        <a:t>Only relevant if trust already mandates one</a:t>
+                        <a:rPr sz="900" b="0">
+                          <a:solidFill>
+                            <a:srgbClr val="1A2E1A"/>
+                          </a:solidFill>
+                          <a:latin typeface="Segoe UI"/>
+                        </a:rPr>
+                        <a:t>1.2.6</a:t>
+                      </a:r>
+                    </a:p>
+                  </a:txBody>
+                  <a:tcPr/>
+                </a:tc>
+                <a:tc>
+                  <a:txBody>
+                    <a:bodyPr/>
+                    <a:lstStyle/>
+                    <a:p>
+                      <a:r>
+                        <a:rPr sz="900" b="0">
+                          <a:solidFill>
+                            <a:srgbClr val="1A2E1A"/>
+                          </a:solidFill>
+                          <a:latin typeface="Segoe UI"/>
+                        </a:rPr>
+                        <a:t>9 Jun 2026</a:t>
+                      </a:r>
+                    </a:p>
+                  </a:txBody>
+                  <a:tcPr/>
+                </a:tc>
+                <a:tc>
+                  <a:txBody>
+                    <a:bodyPr/>
+                    <a:lstStyle/>
+                    <a:p>
+                      <a:r>
+                        <a:rPr sz="900" b="0">
+                          <a:solidFill>
+                            <a:srgbClr val="1A2E1A"/>
+                          </a:solidFill>
+                          <a:latin typeface="Segoe UI"/>
+                        </a:rPr>
+                        <a:t>Case transfer (QR) custom/WMAS only — removed from Standard build; Patient handed over remains on all builds</a:t>
                       </a:r>
                     </a:p>
                   </a:txBody>
@@ -8761,40 +11565,6 @@
           </a:graphicData>
         </a:graphic>
       </p:graphicFrame>
-      <p:sp>
-        <p:nvSpPr>
-          <p:cNvPr id="6" name="TextBox 5"/>
-          <p:cNvSpPr txBox="1"/>
-          <p:nvPr/>
-        </p:nvSpPr>
-        <p:spPr>
-          <a:xfrm>
-            <a:off x="777240" y="5897880"/>
-            <a:ext cx="10424160" cy="502920"/>
-          </a:xfrm>
-          <a:prstGeom prst="rect">
-            <a:avLst/>
-          </a:prstGeom>
-          <a:noFill/>
-        </p:spPr>
-        <p:txBody>
-          <a:bodyPr wrap="none">
-            <a:spAutoFit/>
-          </a:bodyPr>
-          <a:lstStyle/>
-          <a:p>
-            <a:r>
-              <a:rPr sz="1200" b="0">
-                <a:solidFill>
-                  <a:srgbClr val="4A5F4A"/>
-                </a:solidFill>
-                <a:latin typeface="Segoe UI"/>
-              </a:rPr>
-              <a:t>Optional aide for timing, prompts, and logging — not a swap for authoritative sources.</a:t>
-            </a:r>
-          </a:p>
-        </p:txBody>
-      </p:sp>
     </p:spTree>
   </p:cSld>
   <p:clrMapOvr>
@@ -8928,7 +11698,7 @@
                 </a:solidFill>
                 <a:latin typeface="Segoe UI"/>
               </a:rPr>
-              <a:t>4. Cognitive load — reduce or increase?</a:t>
+              <a:t>Changelog from v1.0.0 (4 of 4)</a:t>
             </a:r>
           </a:p>
         </p:txBody>
@@ -8943,7 +11713,7 @@
         </p:nvGraphicFramePr>
         <p:xfrm>
           <a:off x="777240" y="1188720"/>
-          <a:ext cx="10424160" cy="1828800"/>
+          <a:ext cx="10424160" cy="731520"/>
         </p:xfrm>
         <a:graphic>
           <a:graphicData uri="http://schemas.openxmlformats.org/drawingml/2006/table">
@@ -8952,8 +11722,9 @@
                 <a:tableStyleId>{5C22544A-7EE6-4342-B048-85BDC9FD1C3A}</a:tableStyleId>
               </a:tblPr>
               <a:tblGrid>
-                <a:gridCol w="5212080"/>
-                <a:gridCol w="5212080"/>
+                <a:gridCol w="3474720"/>
+                <a:gridCol w="3474720"/>
+                <a:gridCol w="3474720"/>
               </a:tblGrid>
               <a:tr h="365760">
                 <a:tc>
@@ -8962,13 +11733,13 @@
                     <a:lstStyle/>
                     <a:p>
                       <a:r>
-                        <a:rPr sz="1200" b="1">
+                        <a:rPr sz="1100" b="1">
                           <a:solidFill>
                             <a:srgbClr val="FFFFFF"/>
                           </a:solidFill>
                           <a:latin typeface="Segoe UI"/>
                         </a:rPr>
-                        <a:t>Reduces</a:t>
+                        <a:t>Version</a:t>
                       </a:r>
                     </a:p>
                   </a:txBody>
@@ -8984,13 +11755,13 @@
                     <a:lstStyle/>
                     <a:p>
                       <a:r>
-                        <a:rPr sz="1200" b="1">
+                        <a:rPr sz="1100" b="1">
                           <a:solidFill>
                             <a:srgbClr val="FFFFFF"/>
                           </a:solidFill>
                           <a:latin typeface="Segoe UI"/>
                         </a:rPr>
-                        <a:t>Risks if misused</a:t>
+                        <a:t>Released</a:t>
                       </a:r>
                     </a:p>
                   </a:txBody>
@@ -9000,6 +11771,28 @@
                     </a:solidFill>
                   </a:tcPr>
                 </a:tc>
+                <a:tc>
+                  <a:txBody>
+                    <a:bodyPr/>
+                    <a:lstStyle/>
+                    <a:p>
+                      <a:r>
+                        <a:rPr sz="1100" b="1">
+                          <a:solidFill>
+                            <a:srgbClr val="FFFFFF"/>
+                          </a:solidFill>
+                          <a:latin typeface="Segoe UI"/>
+                        </a:rPr>
+                        <a:t>Summary</a:t>
+                      </a:r>
+                    </a:p>
+                  </a:txBody>
+                  <a:tcPr>
+                    <a:solidFill>
+                      <a:srgbClr val="2D6A2D"/>
+                    </a:solidFill>
+                  </a:tcPr>
+                </a:tc>
               </a:tr>
               <a:tr h="365760">
                 <a:tc>
@@ -9008,145 +11801,49 @@
                     <a:lstStyle/>
                     <a:p>
                       <a:r>
-                        <a:rPr sz="1100" b="0">
-                          <a:solidFill>
-                            <a:srgbClr val="1A2E1A"/>
-                          </a:solidFill>
-                          <a:latin typeface="Segoe UI"/>
-                        </a:rPr>
-                        <a:t>One shared clock + due prompts</a:t>
-                      </a:r>
-                    </a:p>
-                  </a:txBody>
-                  <a:tcPr/>
-                </a:tc>
-                <a:tc>
-                  <a:txBody>
-                    <a:bodyPr/>
-                    <a:lstStyle/>
-                    <a:p>
-                      <a:r>
-                        <a:rPr sz="1100" b="0">
-                          <a:solidFill>
-                            <a:srgbClr val="1A2E1A"/>
-                          </a:solidFill>
-                          <a:latin typeface="Segoe UI"/>
-                        </a:rPr>
-                        <a:t>Extra screen during hands-on care</a:t>
-                      </a:r>
-                    </a:p>
-                  </a:txBody>
-                  <a:tcPr/>
-                </a:tc>
-              </a:tr>
-              <a:tr h="365760">
-                <a:tc>
-                  <a:txBody>
-                    <a:bodyPr/>
-                    <a:lstStyle/>
-                    <a:p>
-                      <a:r>
-                        <a:rPr sz="1100" b="0">
-                          <a:solidFill>
-                            <a:srgbClr val="1A2E1A"/>
-                          </a:solidFill>
-                          <a:latin typeface="Segoe UI"/>
-                        </a:rPr>
-                        <a:t>Externalised checklists (4 Hs / 4 Ts, ROSC)</a:t>
-                      </a:r>
-                    </a:p>
-                  </a:txBody>
-                  <a:tcPr/>
-                </a:tc>
-                <a:tc>
-                  <a:txBody>
-                    <a:bodyPr/>
-                    <a:lstStyle/>
-                    <a:p>
-                      <a:r>
-                        <a:rPr sz="1100" b="0">
-                          <a:solidFill>
-                            <a:srgbClr val="1A2E1A"/>
-                          </a:solidFill>
-                          <a:latin typeface="Segoe UI"/>
-                        </a:rPr>
-                        <a:t>Logging takes seconds — scribe role</a:t>
-                      </a:r>
-                    </a:p>
-                  </a:txBody>
-                  <a:tcPr/>
-                </a:tc>
-              </a:tr>
-              <a:tr h="365760">
-                <a:tc>
-                  <a:txBody>
-                    <a:bodyPr/>
-                    <a:lstStyle/>
-                    <a:p>
-                      <a:r>
-                        <a:rPr sz="1100" b="0">
-                          <a:solidFill>
-                            <a:srgbClr val="1A2E1A"/>
-                          </a:solidFill>
-                          <a:latin typeface="Segoe UI"/>
-                        </a:rPr>
-                        <a:t>Less mental arithmetic on drug timing</a:t>
-                      </a:r>
-                    </a:p>
-                  </a:txBody>
-                  <a:tcPr/>
-                </a:tc>
-                <a:tc>
-                  <a:txBody>
-                    <a:bodyPr/>
-                    <a:lstStyle/>
-                    <a:p>
-                      <a:r>
-                        <a:rPr sz="1100" b="0">
-                          <a:solidFill>
-                            <a:srgbClr val="1A2E1A"/>
-                          </a:solidFill>
-                          <a:latin typeface="Segoe UI"/>
-                        </a:rPr>
-                        <a:t>Wrong initial rhythm → wrong branch</a:t>
-                      </a:r>
-                    </a:p>
-                  </a:txBody>
-                  <a:tcPr/>
-                </a:tc>
-              </a:tr>
-              <a:tr h="365760">
-                <a:tc>
-                  <a:txBody>
-                    <a:bodyPr/>
-                    <a:lstStyle/>
-                    <a:p>
-                      <a:r>
-                        <a:rPr sz="1100" b="0">
-                          <a:solidFill>
-                            <a:srgbClr val="1A2E1A"/>
-                          </a:solidFill>
-                          <a:latin typeface="Segoe UI"/>
-                        </a:rPr>
-                        <a:t>Shared reference if crew changes</a:t>
-                      </a:r>
-                    </a:p>
-                  </a:txBody>
-                  <a:tcPr/>
-                </a:tc>
-                <a:tc>
-                  <a:txBody>
-                    <a:bodyPr/>
-                    <a:lstStyle/>
-                    <a:p>
-                      <a:r>
-                        <a:rPr sz="1100" b="0">
-                          <a:solidFill>
-                            <a:srgbClr val="1A2E1A"/>
-                          </a:solidFill>
-                          <a:latin typeface="Segoe UI"/>
-                        </a:rPr>
-                        <a:t>Principle: one person runs the app</a:t>
+                        <a:rPr sz="900" b="0">
+                          <a:solidFill>
+                            <a:srgbClr val="1A2E1A"/>
+                          </a:solidFill>
+                          <a:latin typeface="Segoe UI"/>
+                        </a:rPr>
+                        <a:t>1.2.7</a:t>
+                      </a:r>
+                    </a:p>
+                  </a:txBody>
+                  <a:tcPr/>
+                </a:tc>
+                <a:tc>
+                  <a:txBody>
+                    <a:bodyPr/>
+                    <a:lstStyle/>
+                    <a:p>
+                      <a:r>
+                        <a:rPr sz="900" b="0">
+                          <a:solidFill>
+                            <a:srgbClr val="1A2E1A"/>
+                          </a:solidFill>
+                          <a:latin typeface="Segoe UI"/>
+                        </a:rPr>
+                        <a:t>10 Jun 2026</a:t>
+                      </a:r>
+                    </a:p>
+                  </a:txBody>
+                  <a:tcPr/>
+                </a:tc>
+                <a:tc>
+                  <a:txBody>
+                    <a:bodyPr/>
+                    <a:lstStyle/>
+                    <a:p>
+                      <a:r>
+                        <a:rPr sz="900" b="0">
+                          <a:solidFill>
+                            <a:srgbClr val="1A2E1A"/>
+                          </a:solidFill>
+                          <a:latin typeface="Segoe UI"/>
+                        </a:rPr>
+                        <a:t>Phone timer-bar layout; scroll-for-checklist hint; case continuation uses protocol minutes and last log entry; Standard handover copy</a:t>
                       </a:r>
                     </a:p>
                   </a:txBody>
@@ -9157,6 +11854,40 @@
           </a:graphicData>
         </a:graphic>
       </p:graphicFrame>
+      <p:sp>
+        <p:nvSpPr>
+          <p:cNvPr id="6" name="TextBox 5"/>
+          <p:cNvSpPr txBox="1"/>
+          <p:nvPr/>
+        </p:nvSpPr>
+        <p:spPr>
+          <a:xfrm>
+            <a:off x="777240" y="5897880"/>
+            <a:ext cx="10424160" cy="502920"/>
+          </a:xfrm>
+          <a:prstGeom prst="rect">
+            <a:avLst/>
+          </a:prstGeom>
+          <a:noFill/>
+        </p:spPr>
+        <p:txBody>
+          <a:bodyPr wrap="none">
+            <a:spAutoFit/>
+          </a:bodyPr>
+          <a:lstStyle/>
+          <a:p>
+            <a:r>
+              <a:rPr sz="1200" b="0">
+                <a:solidFill>
+                  <a:srgbClr val="4A5F4A"/>
+                </a:solidFill>
+                <a:latin typeface="Segoe UI"/>
+              </a:rPr>
+              <a:t>Current preview build: v1.2.7 · 10 June 2026. Live field builds on main may trail preview until merged.</a:t>
+            </a:r>
+          </a:p>
+        </p:txBody>
+      </p:sp>
     </p:spTree>
   </p:cSld>
   <p:clrMapOvr>
